--- a/AI_FinOps_Market_Landscape.pptx
+++ b/AI_FinOps_Market_Landscape.pptx
@@ -3971,8 +3971,8 @@
           <p:nvPr/>
         </p:nvGraphicFramePr>
         <p:xfrm>
-          <a:off x="640080" y="1097280"/>
-          <a:ext cx="10789920" cy="3520440"/>
+          <a:off x="640080" y="1051560"/>
+          <a:ext cx="10789920" cy="4608576"/>
         </p:xfrm>
         <a:graphic>
           <a:graphicData uri="http://schemas.openxmlformats.org/drawingml/2006/table">
@@ -3985,7 +3985,7 @@
                 <a:gridCol w="4572000"/>
                 <a:gridCol w="3931920"/>
               </a:tblGrid>
-              <a:tr h="502920">
+              <a:tr h="384048">
                 <a:tc>
                   <a:txBody>
                     <a:bodyPr/>
@@ -4059,7 +4059,7 @@
                   </a:tcPr>
                 </a:tc>
               </a:tr>
-              <a:tr h="502920">
+              <a:tr h="384048">
                 <a:tc>
                   <a:txBody>
                     <a:bodyPr wrap="square"/>
@@ -4133,7 +4133,7 @@
                   </a:tcPr>
                 </a:tc>
               </a:tr>
-              <a:tr h="502920">
+              <a:tr h="384048">
                 <a:tc>
                   <a:txBody>
                     <a:bodyPr wrap="square"/>
@@ -4207,7 +4207,7 @@
                   </a:tcPr>
                 </a:tc>
               </a:tr>
-              <a:tr h="502920">
+              <a:tr h="384048">
                 <a:tc>
                   <a:txBody>
                     <a:bodyPr wrap="square"/>
@@ -4281,7 +4281,7 @@
                   </a:tcPr>
                 </a:tc>
               </a:tr>
-              <a:tr h="502920">
+              <a:tr h="384048">
                 <a:tc>
                   <a:txBody>
                     <a:bodyPr wrap="square"/>
@@ -4355,7 +4355,7 @@
                   </a:tcPr>
                 </a:tc>
               </a:tr>
-              <a:tr h="502920">
+              <a:tr h="384048">
                 <a:tc>
                   <a:txBody>
                     <a:bodyPr wrap="square"/>
@@ -4429,7 +4429,7 @@
                   </a:tcPr>
                 </a:tc>
               </a:tr>
-              <a:tr h="502920">
+              <a:tr h="384048">
                 <a:tc>
                   <a:txBody>
                     <a:bodyPr wrap="square"/>
@@ -4444,13 +4444,383 @@
                         </a:defRPr>
                       </a:pPr>
                       <a:r>
+                        <a:t>LiteLLM Proxy</a:t>
+                      </a:r>
+                    </a:p>
+                  </a:txBody>
+                  <a:tcPr anchor="t">
+                    <a:solidFill>
+                      <a:srgbClr val="E3F2FD"/>
+                    </a:solidFill>
+                  </a:tcPr>
+                </a:tc>
+                <a:tc>
+                  <a:txBody>
+                    <a:bodyPr wrap="square"/>
+                    <a:lstStyle/>
+                    <a:p>
+                      <a:pPr>
+                        <a:defRPr b="0" sz="1000">
+                          <a:solidFill>
+                            <a:srgbClr val="333333"/>
+                          </a:solidFill>
+                          <a:latin typeface="Calibri"/>
+                        </a:defRPr>
+                      </a:pPr>
+                      <a:r>
+                        <a:t>Spend dashboards, usage logs per key/model</a:t>
+                      </a:r>
+                    </a:p>
+                  </a:txBody>
+                  <a:tcPr anchor="t">
+                    <a:solidFill>
+                      <a:srgbClr val="E3F2FD"/>
+                    </a:solidFill>
+                  </a:tcPr>
+                </a:tc>
+                <a:tc>
+                  <a:txBody>
+                    <a:bodyPr wrap="square"/>
+                    <a:lstStyle/>
+                    <a:p>
+                      <a:pPr>
+                        <a:defRPr b="0" sz="1000">
+                          <a:solidFill>
+                            <a:srgbClr val="333333"/>
+                          </a:solidFill>
+                          <a:latin typeface="Calibri"/>
+                        </a:defRPr>
+                      </a:pPr>
+                      <a:r>
+                        <a:t>No forecasting, no optimization engine, no chargeback</a:t>
+                      </a:r>
+                    </a:p>
+                  </a:txBody>
+                  <a:tcPr anchor="t">
+                    <a:solidFill>
+                      <a:srgbClr val="E3F2FD"/>
+                    </a:solidFill>
+                  </a:tcPr>
+                </a:tc>
+              </a:tr>
+              <a:tr h="384048">
+                <a:tc>
+                  <a:txBody>
+                    <a:bodyPr wrap="square"/>
+                    <a:lstStyle/>
+                    <a:p>
+                      <a:pPr>
+                        <a:defRPr b="1" sz="1000">
+                          <a:solidFill>
+                            <a:srgbClr val="1A237E"/>
+                          </a:solidFill>
+                          <a:latin typeface="Calibri"/>
+                        </a:defRPr>
+                      </a:pPr>
+                      <a:r>
+                        <a:t>Langfuse</a:t>
+                      </a:r>
+                    </a:p>
+                  </a:txBody>
+                  <a:tcPr anchor="t">
+                    <a:solidFill>
+                      <a:srgbClr val="FFFFFF"/>
+                    </a:solidFill>
+                  </a:tcPr>
+                </a:tc>
+                <a:tc>
+                  <a:txBody>
+                    <a:bodyPr wrap="square"/>
+                    <a:lstStyle/>
+                    <a:p>
+                      <a:pPr>
+                        <a:defRPr b="0" sz="1000">
+                          <a:solidFill>
+                            <a:srgbClr val="333333"/>
+                          </a:solidFill>
+                          <a:latin typeface="Calibri"/>
+                        </a:defRPr>
+                      </a:pPr>
+                      <a:r>
+                        <a:t>Trace-level dashboards, cost breakdowns</a:t>
+                      </a:r>
+                    </a:p>
+                  </a:txBody>
+                  <a:tcPr anchor="t">
+                    <a:solidFill>
+                      <a:srgbClr val="FFFFFF"/>
+                    </a:solidFill>
+                  </a:tcPr>
+                </a:tc>
+                <a:tc>
+                  <a:txBody>
+                    <a:bodyPr wrap="square"/>
+                    <a:lstStyle/>
+                    <a:p>
+                      <a:pPr>
+                        <a:defRPr b="0" sz="1000">
+                          <a:solidFill>
+                            <a:srgbClr val="333333"/>
+                          </a:solidFill>
+                          <a:latin typeface="Calibri"/>
+                        </a:defRPr>
+                      </a:pPr>
+                      <a:r>
+                        <a:t>No executive reporting, no forecasting or anomaly detection</a:t>
+                      </a:r>
+                    </a:p>
+                  </a:txBody>
+                  <a:tcPr anchor="t">
+                    <a:solidFill>
+                      <a:srgbClr val="FFFFFF"/>
+                    </a:solidFill>
+                  </a:tcPr>
+                </a:tc>
+              </a:tr>
+              <a:tr h="384048">
+                <a:tc>
+                  <a:txBody>
+                    <a:bodyPr wrap="square"/>
+                    <a:lstStyle/>
+                    <a:p>
+                      <a:pPr>
+                        <a:defRPr b="1" sz="1000">
+                          <a:solidFill>
+                            <a:srgbClr val="1A237E"/>
+                          </a:solidFill>
+                          <a:latin typeface="Calibri"/>
+                        </a:defRPr>
+                      </a:pPr>
+                      <a:r>
+                        <a:t>Cloudflare AI Gateway</a:t>
+                      </a:r>
+                    </a:p>
+                  </a:txBody>
+                  <a:tcPr anchor="t">
+                    <a:solidFill>
+                      <a:srgbClr val="E3F2FD"/>
+                    </a:solidFill>
+                  </a:tcPr>
+                </a:tc>
+                <a:tc>
+                  <a:txBody>
+                    <a:bodyPr wrap="square"/>
+                    <a:lstStyle/>
+                    <a:p>
+                      <a:pPr>
+                        <a:defRPr b="0" sz="1000">
+                          <a:solidFill>
+                            <a:srgbClr val="333333"/>
+                          </a:solidFill>
+                          <a:latin typeface="Calibri"/>
+                        </a:defRPr>
+                      </a:pPr>
+                      <a:r>
+                        <a:t>Basic analytics dashboard, caching stats</a:t>
+                      </a:r>
+                    </a:p>
+                  </a:txBody>
+                  <a:tcPr anchor="t">
+                    <a:solidFill>
+                      <a:srgbClr val="E3F2FD"/>
+                    </a:solidFill>
+                  </a:tcPr>
+                </a:tc>
+                <a:tc>
+                  <a:txBody>
+                    <a:bodyPr wrap="square"/>
+                    <a:lstStyle/>
+                    <a:p>
+                      <a:pPr>
+                        <a:defRPr b="0" sz="1000">
+                          <a:solidFill>
+                            <a:srgbClr val="333333"/>
+                          </a:solidFill>
+                          <a:latin typeface="Calibri"/>
+                        </a:defRPr>
+                      </a:pPr>
+                      <a:r>
+                        <a:t>No optimization recommendations, no chargeback</a:t>
+                      </a:r>
+                    </a:p>
+                  </a:txBody>
+                  <a:tcPr anchor="t">
+                    <a:solidFill>
+                      <a:srgbClr val="E3F2FD"/>
+                    </a:solidFill>
+                  </a:tcPr>
+                </a:tc>
+              </a:tr>
+              <a:tr h="384048">
+                <a:tc>
+                  <a:txBody>
+                    <a:bodyPr wrap="square"/>
+                    <a:lstStyle/>
+                    <a:p>
+                      <a:pPr>
+                        <a:defRPr b="1" sz="1000">
+                          <a:solidFill>
+                            <a:srgbClr val="1A237E"/>
+                          </a:solidFill>
+                          <a:latin typeface="Calibri"/>
+                        </a:defRPr>
+                      </a:pPr>
+                      <a:r>
+                        <a:t>Datadog LLM Observability</a:t>
+                      </a:r>
+                    </a:p>
+                  </a:txBody>
+                  <a:tcPr anchor="t">
+                    <a:solidFill>
+                      <a:srgbClr val="FFFFFF"/>
+                    </a:solidFill>
+                  </a:tcPr>
+                </a:tc>
+                <a:tc>
+                  <a:txBody>
+                    <a:bodyPr wrap="square"/>
+                    <a:lstStyle/>
+                    <a:p>
+                      <a:pPr>
+                        <a:defRPr b="0" sz="1000">
+                          <a:solidFill>
+                            <a:srgbClr val="333333"/>
+                          </a:solidFill>
+                          <a:latin typeface="Calibri"/>
+                        </a:defRPr>
+                      </a:pPr>
+                      <a:r>
+                        <a:t>Enterprise dashboards, alerting, anomaly detection</a:t>
+                      </a:r>
+                    </a:p>
+                  </a:txBody>
+                  <a:tcPr anchor="t">
+                    <a:solidFill>
+                      <a:srgbClr val="FFFFFF"/>
+                    </a:solidFill>
+                  </a:tcPr>
+                </a:tc>
+                <a:tc>
+                  <a:txBody>
+                    <a:bodyPr wrap="square"/>
+                    <a:lstStyle/>
+                    <a:p>
+                      <a:pPr>
+                        <a:defRPr b="0" sz="1000">
+                          <a:solidFill>
+                            <a:srgbClr val="333333"/>
+                          </a:solidFill>
+                          <a:latin typeface="Calibri"/>
+                        </a:defRPr>
+                      </a:pPr>
+                      <a:r>
+                        <a:t>No AI-specific optimization; generic APM recommendations</a:t>
+                      </a:r>
+                    </a:p>
+                  </a:txBody>
+                  <a:tcPr anchor="t">
+                    <a:solidFill>
+                      <a:srgbClr val="FFFFFF"/>
+                    </a:solidFill>
+                  </a:tcPr>
+                </a:tc>
+              </a:tr>
+              <a:tr h="384048">
+                <a:tc>
+                  <a:txBody>
+                    <a:bodyPr wrap="square"/>
+                    <a:lstStyle/>
+                    <a:p>
+                      <a:pPr>
+                        <a:defRPr b="1" sz="1000">
+                          <a:solidFill>
+                            <a:srgbClr val="1A237E"/>
+                          </a:solidFill>
+                          <a:latin typeface="Calibri"/>
+                        </a:defRPr>
+                      </a:pPr>
+                      <a:r>
+                        <a:t>Braintrust</a:t>
+                      </a:r>
+                    </a:p>
+                  </a:txBody>
+                  <a:tcPr anchor="t">
+                    <a:solidFill>
+                      <a:srgbClr val="E3F2FD"/>
+                    </a:solidFill>
+                  </a:tcPr>
+                </a:tc>
+                <a:tc>
+                  <a:txBody>
+                    <a:bodyPr wrap="square"/>
+                    <a:lstStyle/>
+                    <a:p>
+                      <a:pPr>
+                        <a:defRPr b="0" sz="1000">
+                          <a:solidFill>
+                            <a:srgbClr val="333333"/>
+                          </a:solidFill>
+                          <a:latin typeface="Calibri"/>
+                        </a:defRPr>
+                      </a:pPr>
+                      <a:r>
+                        <a:t>Eval result dashboards, model comparison reports</a:t>
+                      </a:r>
+                    </a:p>
+                  </a:txBody>
+                  <a:tcPr anchor="t">
+                    <a:solidFill>
+                      <a:srgbClr val="E3F2FD"/>
+                    </a:solidFill>
+                  </a:tcPr>
+                </a:tc>
+                <a:tc>
+                  <a:txBody>
+                    <a:bodyPr wrap="square"/>
+                    <a:lstStyle/>
+                    <a:p>
+                      <a:pPr>
+                        <a:defRPr b="0" sz="1000">
+                          <a:solidFill>
+                            <a:srgbClr val="333333"/>
+                          </a:solidFill>
+                          <a:latin typeface="Calibri"/>
+                        </a:defRPr>
+                      </a:pPr>
+                      <a:r>
+                        <a:t>No cost forecasting, no chargeback, eval-scoped only</a:t>
+                      </a:r>
+                    </a:p>
+                  </a:txBody>
+                  <a:tcPr anchor="t">
+                    <a:solidFill>
+                      <a:srgbClr val="E3F2FD"/>
+                    </a:solidFill>
+                  </a:tcPr>
+                </a:tc>
+              </a:tr>
+              <a:tr h="384048">
+                <a:tc>
+                  <a:txBody>
+                    <a:bodyPr wrap="square"/>
+                    <a:lstStyle/>
+                    <a:p>
+                      <a:pPr>
+                        <a:defRPr b="1" sz="1000">
+                          <a:solidFill>
+                            <a:srgbClr val="1A237E"/>
+                          </a:solidFill>
+                          <a:latin typeface="Calibri"/>
+                        </a:defRPr>
+                      </a:pPr>
+                      <a:r>
                         <a:t>Cast AI</a:t>
                       </a:r>
                     </a:p>
                   </a:txBody>
                   <a:tcPr anchor="t">
                     <a:solidFill>
-                      <a:srgbClr val="E3F2FD"/>
+                      <a:srgbClr val="FFFFFF"/>
                     </a:solidFill>
                   </a:tcPr>
                 </a:tc>
@@ -4474,7 +4844,7 @@
                   </a:txBody>
                   <a:tcPr anchor="t">
                     <a:solidFill>
-                      <a:srgbClr val="E3F2FD"/>
+                      <a:srgbClr val="FFFFFF"/>
                     </a:solidFill>
                   </a:tcPr>
                 </a:tc>
@@ -4498,7 +4868,7 @@
                   </a:txBody>
                   <a:tcPr anchor="t">
                     <a:solidFill>
-                      <a:srgbClr val="E3F2FD"/>
+                      <a:srgbClr val="FFFFFF"/>
                     </a:solidFill>
                   </a:tcPr>
                 </a:tc>
@@ -4515,7 +4885,7 @@
         </p:nvSpPr>
         <p:spPr>
           <a:xfrm>
-            <a:off x="640080" y="5303520"/>
+            <a:off x="640080" y="5806440"/>
             <a:ext cx="10789920" cy="640080"/>
           </a:xfrm>
           <a:prstGeom prst="rect">
@@ -4558,7 +4928,7 @@
         </p:nvSpPr>
         <p:spPr>
           <a:xfrm>
-            <a:off x="822960" y="5349240"/>
+            <a:off x="822960" y="5852160"/>
             <a:ext cx="10424160" cy="548640"/>
           </a:xfrm>
           <a:prstGeom prst="rect">
@@ -4744,7 +5114,7 @@
         </p:nvGraphicFramePr>
         <p:xfrm>
           <a:off x="640080" y="1051560"/>
-          <a:ext cx="10058400" cy="4389120"/>
+          <a:ext cx="10058400" cy="5129784"/>
         </p:xfrm>
         <a:graphic>
           <a:graphicData uri="http://schemas.openxmlformats.org/drawingml/2006/table">
@@ -4760,7 +5130,7 @@
                 <a:gridCol w="1645920"/>
                 <a:gridCol w="1005840"/>
               </a:tblGrid>
-              <a:tr h="365760">
+              <a:tr h="301752">
                 <a:tc>
                   <a:txBody>
                     <a:bodyPr/>
@@ -4906,7 +5276,7 @@
                   </a:tcPr>
                 </a:tc>
               </a:tr>
-              <a:tr h="365760">
+              <a:tr h="301752">
                 <a:tc>
                   <a:txBody>
                     <a:bodyPr wrap="square"/>
@@ -5052,7 +5422,7 @@
                   </a:tcPr>
                 </a:tc>
               </a:tr>
-              <a:tr h="365760">
+              <a:tr h="301752">
                 <a:tc>
                   <a:txBody>
                     <a:bodyPr wrap="square"/>
@@ -5198,7 +5568,7 @@
                   </a:tcPr>
                 </a:tc>
               </a:tr>
-              <a:tr h="365760">
+              <a:tr h="301752">
                 <a:tc>
                   <a:txBody>
                     <a:bodyPr wrap="square"/>
@@ -5344,7 +5714,7 @@
                   </a:tcPr>
                 </a:tc>
               </a:tr>
-              <a:tr h="365760">
+              <a:tr h="301752">
                 <a:tc>
                   <a:txBody>
                     <a:bodyPr wrap="square"/>
@@ -5490,7 +5860,7 @@
                   </a:tcPr>
                 </a:tc>
               </a:tr>
-              <a:tr h="365760">
+              <a:tr h="301752">
                 <a:tc>
                   <a:txBody>
                     <a:bodyPr wrap="square"/>
@@ -5505,12 +5875,888 @@
                         </a:defRPr>
                       </a:pPr>
                       <a:r>
+                        <a:t>LiteLLM Proxy</a:t>
+                      </a:r>
+                    </a:p>
+                  </a:txBody>
+                  <a:tcPr anchor="t">
+                    <a:solidFill>
+                      <a:srgbClr val="FFFFFF"/>
+                    </a:solidFill>
+                  </a:tcPr>
+                </a:tc>
+                <a:tc>
+                  <a:txBody>
+                    <a:bodyPr wrap="square"/>
+                    <a:lstStyle/>
+                    <a:p>
+                      <a:pPr>
+                        <a:defRPr b="0" sz="1000">
+                          <a:solidFill>
+                            <a:srgbClr val="333333"/>
+                          </a:solidFill>
+                          <a:latin typeface="Calibri"/>
+                        </a:defRPr>
+                      </a:pPr>
+                      <a:r>
+                        <a:t>3</a:t>
+                      </a:r>
+                    </a:p>
+                  </a:txBody>
+                  <a:tcPr anchor="t">
+                    <a:solidFill>
+                      <a:srgbClr val="FFFFFF"/>
+                    </a:solidFill>
+                  </a:tcPr>
+                </a:tc>
+                <a:tc>
+                  <a:txBody>
+                    <a:bodyPr wrap="square"/>
+                    <a:lstStyle/>
+                    <a:p>
+                      <a:pPr>
+                        <a:defRPr b="0" sz="1000">
+                          <a:solidFill>
+                            <a:srgbClr val="333333"/>
+                          </a:solidFill>
+                          <a:latin typeface="Calibri"/>
+                        </a:defRPr>
+                      </a:pPr>
+                      <a:r>
+                        <a:t>3</a:t>
+                      </a:r>
+                    </a:p>
+                  </a:txBody>
+                  <a:tcPr anchor="t">
+                    <a:solidFill>
+                      <a:srgbClr val="FFFFFF"/>
+                    </a:solidFill>
+                  </a:tcPr>
+                </a:tc>
+                <a:tc>
+                  <a:txBody>
+                    <a:bodyPr wrap="square"/>
+                    <a:lstStyle/>
+                    <a:p>
+                      <a:pPr>
+                        <a:defRPr b="0" sz="1000">
+                          <a:solidFill>
+                            <a:srgbClr val="333333"/>
+                          </a:solidFill>
+                          <a:latin typeface="Calibri"/>
+                        </a:defRPr>
+                      </a:pPr>
+                      <a:r>
+                        <a:t>2</a:t>
+                      </a:r>
+                    </a:p>
+                  </a:txBody>
+                  <a:tcPr anchor="t">
+                    <a:solidFill>
+                      <a:srgbClr val="FFFFFF"/>
+                    </a:solidFill>
+                  </a:tcPr>
+                </a:tc>
+                <a:tc>
+                  <a:txBody>
+                    <a:bodyPr wrap="square"/>
+                    <a:lstStyle/>
+                    <a:p>
+                      <a:pPr>
+                        <a:defRPr b="0" sz="1000">
+                          <a:solidFill>
+                            <a:srgbClr val="333333"/>
+                          </a:solidFill>
+                          <a:latin typeface="Calibri"/>
+                        </a:defRPr>
+                      </a:pPr>
+                      <a:r>
+                        <a:t>2</a:t>
+                      </a:r>
+                    </a:p>
+                  </a:txBody>
+                  <a:tcPr anchor="t">
+                    <a:solidFill>
+                      <a:srgbClr val="FFFFFF"/>
+                    </a:solidFill>
+                  </a:tcPr>
+                </a:tc>
+                <a:tc>
+                  <a:txBody>
+                    <a:bodyPr wrap="square"/>
+                    <a:lstStyle/>
+                    <a:p>
+                      <a:pPr>
+                        <a:defRPr b="0" sz="1000">
+                          <a:solidFill>
+                            <a:srgbClr val="333333"/>
+                          </a:solidFill>
+                          <a:latin typeface="Calibri"/>
+                        </a:defRPr>
+                      </a:pPr>
+                      <a:r>
+                        <a:t>10</a:t>
+                      </a:r>
+                    </a:p>
+                  </a:txBody>
+                  <a:tcPr anchor="t">
+                    <a:solidFill>
+                      <a:srgbClr val="FFFFFF"/>
+                    </a:solidFill>
+                  </a:tcPr>
+                </a:tc>
+              </a:tr>
+              <a:tr h="301752">
+                <a:tc>
+                  <a:txBody>
+                    <a:bodyPr wrap="square"/>
+                    <a:lstStyle/>
+                    <a:p>
+                      <a:pPr>
+                        <a:defRPr b="1" sz="1000">
+                          <a:solidFill>
+                            <a:srgbClr val="1A237E"/>
+                          </a:solidFill>
+                          <a:latin typeface="Calibri"/>
+                        </a:defRPr>
+                      </a:pPr>
+                      <a:r>
+                        <a:t>Langfuse</a:t>
+                      </a:r>
+                    </a:p>
+                  </a:txBody>
+                  <a:tcPr anchor="t">
+                    <a:solidFill>
+                      <a:srgbClr val="E3F2FD"/>
+                    </a:solidFill>
+                  </a:tcPr>
+                </a:tc>
+                <a:tc>
+                  <a:txBody>
+                    <a:bodyPr wrap="square"/>
+                    <a:lstStyle/>
+                    <a:p>
+                      <a:pPr>
+                        <a:defRPr b="0" sz="1000">
+                          <a:solidFill>
+                            <a:srgbClr val="333333"/>
+                          </a:solidFill>
+                          <a:latin typeface="Calibri"/>
+                        </a:defRPr>
+                      </a:pPr>
+                      <a:r>
+                        <a:t>4</a:t>
+                      </a:r>
+                    </a:p>
+                  </a:txBody>
+                  <a:tcPr anchor="t">
+                    <a:solidFill>
+                      <a:srgbClr val="E3F2FD"/>
+                    </a:solidFill>
+                  </a:tcPr>
+                </a:tc>
+                <a:tc>
+                  <a:txBody>
+                    <a:bodyPr wrap="square"/>
+                    <a:lstStyle/>
+                    <a:p>
+                      <a:pPr>
+                        <a:defRPr b="0" sz="1000">
+                          <a:solidFill>
+                            <a:srgbClr val="333333"/>
+                          </a:solidFill>
+                          <a:latin typeface="Calibri"/>
+                        </a:defRPr>
+                      </a:pPr>
+                      <a:r>
+                        <a:t>1</a:t>
+                      </a:r>
+                    </a:p>
+                  </a:txBody>
+                  <a:tcPr anchor="t">
+                    <a:solidFill>
+                      <a:srgbClr val="E3F2FD"/>
+                    </a:solidFill>
+                  </a:tcPr>
+                </a:tc>
+                <a:tc>
+                  <a:txBody>
+                    <a:bodyPr wrap="square"/>
+                    <a:lstStyle/>
+                    <a:p>
+                      <a:pPr>
+                        <a:defRPr b="0" sz="1000">
+                          <a:solidFill>
+                            <a:srgbClr val="333333"/>
+                          </a:solidFill>
+                          <a:latin typeface="Calibri"/>
+                        </a:defRPr>
+                      </a:pPr>
+                      <a:r>
+                        <a:t>3</a:t>
+                      </a:r>
+                    </a:p>
+                  </a:txBody>
+                  <a:tcPr anchor="t">
+                    <a:solidFill>
+                      <a:srgbClr val="E3F2FD"/>
+                    </a:solidFill>
+                  </a:tcPr>
+                </a:tc>
+                <a:tc>
+                  <a:txBody>
+                    <a:bodyPr wrap="square"/>
+                    <a:lstStyle/>
+                    <a:p>
+                      <a:pPr>
+                        <a:defRPr b="0" sz="1000">
+                          <a:solidFill>
+                            <a:srgbClr val="333333"/>
+                          </a:solidFill>
+                          <a:latin typeface="Calibri"/>
+                        </a:defRPr>
+                      </a:pPr>
+                      <a:r>
+                        <a:t>3</a:t>
+                      </a:r>
+                    </a:p>
+                  </a:txBody>
+                  <a:tcPr anchor="t">
+                    <a:solidFill>
+                      <a:srgbClr val="E3F2FD"/>
+                    </a:solidFill>
+                  </a:tcPr>
+                </a:tc>
+                <a:tc>
+                  <a:txBody>
+                    <a:bodyPr wrap="square"/>
+                    <a:lstStyle/>
+                    <a:p>
+                      <a:pPr>
+                        <a:defRPr b="0" sz="1000">
+                          <a:solidFill>
+                            <a:srgbClr val="333333"/>
+                          </a:solidFill>
+                          <a:latin typeface="Calibri"/>
+                        </a:defRPr>
+                      </a:pPr>
+                      <a:r>
+                        <a:t>11</a:t>
+                      </a:r>
+                    </a:p>
+                  </a:txBody>
+                  <a:tcPr anchor="t">
+                    <a:solidFill>
+                      <a:srgbClr val="E3F2FD"/>
+                    </a:solidFill>
+                  </a:tcPr>
+                </a:tc>
+              </a:tr>
+              <a:tr h="301752">
+                <a:tc>
+                  <a:txBody>
+                    <a:bodyPr wrap="square"/>
+                    <a:lstStyle/>
+                    <a:p>
+                      <a:pPr>
+                        <a:defRPr b="1" sz="1000">
+                          <a:solidFill>
+                            <a:srgbClr val="1A237E"/>
+                          </a:solidFill>
+                          <a:latin typeface="Calibri"/>
+                        </a:defRPr>
+                      </a:pPr>
+                      <a:r>
+                        <a:t>Cloudflare AI GW</a:t>
+                      </a:r>
+                    </a:p>
+                  </a:txBody>
+                  <a:tcPr anchor="t">
+                    <a:solidFill>
+                      <a:srgbClr val="FFFFFF"/>
+                    </a:solidFill>
+                  </a:tcPr>
+                </a:tc>
+                <a:tc>
+                  <a:txBody>
+                    <a:bodyPr wrap="square"/>
+                    <a:lstStyle/>
+                    <a:p>
+                      <a:pPr>
+                        <a:defRPr b="0" sz="1000">
+                          <a:solidFill>
+                            <a:srgbClr val="333333"/>
+                          </a:solidFill>
+                          <a:latin typeface="Calibri"/>
+                        </a:defRPr>
+                      </a:pPr>
+                      <a:r>
+                        <a:t>3</a:t>
+                      </a:r>
+                    </a:p>
+                  </a:txBody>
+                  <a:tcPr anchor="t">
+                    <a:solidFill>
+                      <a:srgbClr val="FFFFFF"/>
+                    </a:solidFill>
+                  </a:tcPr>
+                </a:tc>
+                <a:tc>
+                  <a:txBody>
+                    <a:bodyPr wrap="square"/>
+                    <a:lstStyle/>
+                    <a:p>
+                      <a:pPr>
+                        <a:defRPr b="0" sz="1000">
+                          <a:solidFill>
+                            <a:srgbClr val="333333"/>
+                          </a:solidFill>
+                          <a:latin typeface="Calibri"/>
+                        </a:defRPr>
+                      </a:pPr>
+                      <a:r>
+                        <a:t>2</a:t>
+                      </a:r>
+                    </a:p>
+                  </a:txBody>
+                  <a:tcPr anchor="t">
+                    <a:solidFill>
+                      <a:srgbClr val="FFFFFF"/>
+                    </a:solidFill>
+                  </a:tcPr>
+                </a:tc>
+                <a:tc>
+                  <a:txBody>
+                    <a:bodyPr wrap="square"/>
+                    <a:lstStyle/>
+                    <a:p>
+                      <a:pPr>
+                        <a:defRPr b="0" sz="1000">
+                          <a:solidFill>
+                            <a:srgbClr val="333333"/>
+                          </a:solidFill>
+                          <a:latin typeface="Calibri"/>
+                        </a:defRPr>
+                      </a:pPr>
+                      <a:r>
+                        <a:t>1</a:t>
+                      </a:r>
+                    </a:p>
+                  </a:txBody>
+                  <a:tcPr anchor="t">
+                    <a:solidFill>
+                      <a:srgbClr val="FFFFFF"/>
+                    </a:solidFill>
+                  </a:tcPr>
+                </a:tc>
+                <a:tc>
+                  <a:txBody>
+                    <a:bodyPr wrap="square"/>
+                    <a:lstStyle/>
+                    <a:p>
+                      <a:pPr>
+                        <a:defRPr b="0" sz="1000">
+                          <a:solidFill>
+                            <a:srgbClr val="333333"/>
+                          </a:solidFill>
+                          <a:latin typeface="Calibri"/>
+                        </a:defRPr>
+                      </a:pPr>
+                      <a:r>
+                        <a:t>2</a:t>
+                      </a:r>
+                    </a:p>
+                  </a:txBody>
+                  <a:tcPr anchor="t">
+                    <a:solidFill>
+                      <a:srgbClr val="FFFFFF"/>
+                    </a:solidFill>
+                  </a:tcPr>
+                </a:tc>
+                <a:tc>
+                  <a:txBody>
+                    <a:bodyPr wrap="square"/>
+                    <a:lstStyle/>
+                    <a:p>
+                      <a:pPr>
+                        <a:defRPr b="0" sz="1000">
+                          <a:solidFill>
+                            <a:srgbClr val="333333"/>
+                          </a:solidFill>
+                          <a:latin typeface="Calibri"/>
+                        </a:defRPr>
+                      </a:pPr>
+                      <a:r>
+                        <a:t>8</a:t>
+                      </a:r>
+                    </a:p>
+                  </a:txBody>
+                  <a:tcPr anchor="t">
+                    <a:solidFill>
+                      <a:srgbClr val="FFFFFF"/>
+                    </a:solidFill>
+                  </a:tcPr>
+                </a:tc>
+              </a:tr>
+              <a:tr h="301752">
+                <a:tc>
+                  <a:txBody>
+                    <a:bodyPr wrap="square"/>
+                    <a:lstStyle/>
+                    <a:p>
+                      <a:pPr>
+                        <a:defRPr b="1" sz="1000">
+                          <a:solidFill>
+                            <a:srgbClr val="1A237E"/>
+                          </a:solidFill>
+                          <a:latin typeface="Calibri"/>
+                        </a:defRPr>
+                      </a:pPr>
+                      <a:r>
+                        <a:t>Datadog LLM Obs.</a:t>
+                      </a:r>
+                    </a:p>
+                  </a:txBody>
+                  <a:tcPr anchor="t">
+                    <a:solidFill>
+                      <a:srgbClr val="E3F2FD"/>
+                    </a:solidFill>
+                  </a:tcPr>
+                </a:tc>
+                <a:tc>
+                  <a:txBody>
+                    <a:bodyPr wrap="square"/>
+                    <a:lstStyle/>
+                    <a:p>
+                      <a:pPr>
+                        <a:defRPr b="0" sz="1000">
+                          <a:solidFill>
+                            <a:srgbClr val="333333"/>
+                          </a:solidFill>
+                          <a:latin typeface="Calibri"/>
+                        </a:defRPr>
+                      </a:pPr>
+                      <a:r>
+                        <a:t>3</a:t>
+                      </a:r>
+                    </a:p>
+                  </a:txBody>
+                  <a:tcPr anchor="t">
+                    <a:solidFill>
+                      <a:srgbClr val="E3F2FD"/>
+                    </a:solidFill>
+                  </a:tcPr>
+                </a:tc>
+                <a:tc>
+                  <a:txBody>
+                    <a:bodyPr wrap="square"/>
+                    <a:lstStyle/>
+                    <a:p>
+                      <a:pPr>
+                        <a:defRPr b="0" sz="1000">
+                          <a:solidFill>
+                            <a:srgbClr val="333333"/>
+                          </a:solidFill>
+                          <a:latin typeface="Calibri"/>
+                        </a:defRPr>
+                      </a:pPr>
+                      <a:r>
+                        <a:t>1</a:t>
+                      </a:r>
+                    </a:p>
+                  </a:txBody>
+                  <a:tcPr anchor="t">
+                    <a:solidFill>
+                      <a:srgbClr val="E3F2FD"/>
+                    </a:solidFill>
+                  </a:tcPr>
+                </a:tc>
+                <a:tc>
+                  <a:txBody>
+                    <a:bodyPr wrap="square"/>
+                    <a:lstStyle/>
+                    <a:p>
+                      <a:pPr>
+                        <a:defRPr b="0" sz="1000">
+                          <a:solidFill>
+                            <a:srgbClr val="333333"/>
+                          </a:solidFill>
+                          <a:latin typeface="Calibri"/>
+                        </a:defRPr>
+                      </a:pPr>
+                      <a:r>
+                        <a:t>2</a:t>
+                      </a:r>
+                    </a:p>
+                  </a:txBody>
+                  <a:tcPr anchor="t">
+                    <a:solidFill>
+                      <a:srgbClr val="E3F2FD"/>
+                    </a:solidFill>
+                  </a:tcPr>
+                </a:tc>
+                <a:tc>
+                  <a:txBody>
+                    <a:bodyPr wrap="square"/>
+                    <a:lstStyle/>
+                    <a:p>
+                      <a:pPr>
+                        <a:defRPr b="0" sz="1000">
+                          <a:solidFill>
+                            <a:srgbClr val="333333"/>
+                          </a:solidFill>
+                          <a:latin typeface="Calibri"/>
+                        </a:defRPr>
+                      </a:pPr>
+                      <a:r>
+                        <a:t>4</a:t>
+                      </a:r>
+                    </a:p>
+                  </a:txBody>
+                  <a:tcPr anchor="t">
+                    <a:solidFill>
+                      <a:srgbClr val="E3F2FD"/>
+                    </a:solidFill>
+                  </a:tcPr>
+                </a:tc>
+                <a:tc>
+                  <a:txBody>
+                    <a:bodyPr wrap="square"/>
+                    <a:lstStyle/>
+                    <a:p>
+                      <a:pPr>
+                        <a:defRPr b="0" sz="1000">
+                          <a:solidFill>
+                            <a:srgbClr val="333333"/>
+                          </a:solidFill>
+                          <a:latin typeface="Calibri"/>
+                        </a:defRPr>
+                      </a:pPr>
+                      <a:r>
+                        <a:t>10</a:t>
+                      </a:r>
+                    </a:p>
+                  </a:txBody>
+                  <a:tcPr anchor="t">
+                    <a:solidFill>
+                      <a:srgbClr val="E3F2FD"/>
+                    </a:solidFill>
+                  </a:tcPr>
+                </a:tc>
+              </a:tr>
+              <a:tr h="301752">
+                <a:tc>
+                  <a:txBody>
+                    <a:bodyPr wrap="square"/>
+                    <a:lstStyle/>
+                    <a:p>
+                      <a:pPr>
+                        <a:defRPr b="1" sz="1000">
+                          <a:solidFill>
+                            <a:srgbClr val="1A237E"/>
+                          </a:solidFill>
+                          <a:latin typeface="Calibri"/>
+                        </a:defRPr>
+                      </a:pPr>
+                      <a:r>
+                        <a:t>Braintrust</a:t>
+                      </a:r>
+                    </a:p>
+                  </a:txBody>
+                  <a:tcPr anchor="t">
+                    <a:solidFill>
+                      <a:srgbClr val="FFFFFF"/>
+                    </a:solidFill>
+                  </a:tcPr>
+                </a:tc>
+                <a:tc>
+                  <a:txBody>
+                    <a:bodyPr wrap="square"/>
+                    <a:lstStyle/>
+                    <a:p>
+                      <a:pPr>
+                        <a:defRPr b="0" sz="1000">
+                          <a:solidFill>
+                            <a:srgbClr val="333333"/>
+                          </a:solidFill>
+                          <a:latin typeface="Calibri"/>
+                        </a:defRPr>
+                      </a:pPr>
+                      <a:r>
+                        <a:t>2</a:t>
+                      </a:r>
+                    </a:p>
+                  </a:txBody>
+                  <a:tcPr anchor="t">
+                    <a:solidFill>
+                      <a:srgbClr val="FFFFFF"/>
+                    </a:solidFill>
+                  </a:tcPr>
+                </a:tc>
+                <a:tc>
+                  <a:txBody>
+                    <a:bodyPr wrap="square"/>
+                    <a:lstStyle/>
+                    <a:p>
+                      <a:pPr>
+                        <a:defRPr b="0" sz="1000">
+                          <a:solidFill>
+                            <a:srgbClr val="333333"/>
+                          </a:solidFill>
+                          <a:latin typeface="Calibri"/>
+                        </a:defRPr>
+                      </a:pPr>
+                      <a:r>
+                        <a:t>1</a:t>
+                      </a:r>
+                    </a:p>
+                  </a:txBody>
+                  <a:tcPr anchor="t">
+                    <a:solidFill>
+                      <a:srgbClr val="FFFFFF"/>
+                    </a:solidFill>
+                  </a:tcPr>
+                </a:tc>
+                <a:tc>
+                  <a:txBody>
+                    <a:bodyPr wrap="square"/>
+                    <a:lstStyle/>
+                    <a:p>
+                      <a:pPr>
+                        <a:defRPr b="0" sz="1000">
+                          <a:solidFill>
+                            <a:srgbClr val="333333"/>
+                          </a:solidFill>
+                          <a:latin typeface="Calibri"/>
+                        </a:defRPr>
+                      </a:pPr>
+                      <a:r>
+                        <a:t>2</a:t>
+                      </a:r>
+                    </a:p>
+                  </a:txBody>
+                  <a:tcPr anchor="t">
+                    <a:solidFill>
+                      <a:srgbClr val="FFFFFF"/>
+                    </a:solidFill>
+                  </a:tcPr>
+                </a:tc>
+                <a:tc>
+                  <a:txBody>
+                    <a:bodyPr wrap="square"/>
+                    <a:lstStyle/>
+                    <a:p>
+                      <a:pPr>
+                        <a:defRPr b="0" sz="1000">
+                          <a:solidFill>
+                            <a:srgbClr val="333333"/>
+                          </a:solidFill>
+                          <a:latin typeface="Calibri"/>
+                        </a:defRPr>
+                      </a:pPr>
+                      <a:r>
+                        <a:t>2</a:t>
+                      </a:r>
+                    </a:p>
+                  </a:txBody>
+                  <a:tcPr anchor="t">
+                    <a:solidFill>
+                      <a:srgbClr val="FFFFFF"/>
+                    </a:solidFill>
+                  </a:tcPr>
+                </a:tc>
+                <a:tc>
+                  <a:txBody>
+                    <a:bodyPr wrap="square"/>
+                    <a:lstStyle/>
+                    <a:p>
+                      <a:pPr>
+                        <a:defRPr b="0" sz="1000">
+                          <a:solidFill>
+                            <a:srgbClr val="333333"/>
+                          </a:solidFill>
+                          <a:latin typeface="Calibri"/>
+                        </a:defRPr>
+                      </a:pPr>
+                      <a:r>
+                        <a:t>7</a:t>
+                      </a:r>
+                    </a:p>
+                  </a:txBody>
+                  <a:tcPr anchor="t">
+                    <a:solidFill>
+                      <a:srgbClr val="FFFFFF"/>
+                    </a:solidFill>
+                  </a:tcPr>
+                </a:tc>
+              </a:tr>
+              <a:tr h="301752">
+                <a:tc>
+                  <a:txBody>
+                    <a:bodyPr wrap="square"/>
+                    <a:lstStyle/>
+                    <a:p>
+                      <a:pPr>
+                        <a:defRPr b="1" sz="1000">
+                          <a:solidFill>
+                            <a:srgbClr val="1A237E"/>
+                          </a:solidFill>
+                          <a:latin typeface="Calibri"/>
+                        </a:defRPr>
+                      </a:pPr>
+                      <a:r>
                         <a:t>Kubecost</a:t>
                       </a:r>
                     </a:p>
                   </a:txBody>
                   <a:tcPr anchor="t">
                     <a:solidFill>
+                      <a:srgbClr val="E3F2FD"/>
+                    </a:solidFill>
+                  </a:tcPr>
+                </a:tc>
+                <a:tc>
+                  <a:txBody>
+                    <a:bodyPr wrap="square"/>
+                    <a:lstStyle/>
+                    <a:p>
+                      <a:pPr>
+                        <a:defRPr b="0" sz="1000">
+                          <a:solidFill>
+                            <a:srgbClr val="333333"/>
+                          </a:solidFill>
+                          <a:latin typeface="Calibri"/>
+                        </a:defRPr>
+                      </a:pPr>
+                      <a:r>
+                        <a:t>1</a:t>
+                      </a:r>
+                    </a:p>
+                  </a:txBody>
+                  <a:tcPr anchor="t">
+                    <a:solidFill>
+                      <a:srgbClr val="E3F2FD"/>
+                    </a:solidFill>
+                  </a:tcPr>
+                </a:tc>
+                <a:tc>
+                  <a:txBody>
+                    <a:bodyPr wrap="square"/>
+                    <a:lstStyle/>
+                    <a:p>
+                      <a:pPr>
+                        <a:defRPr b="0" sz="1000">
+                          <a:solidFill>
+                            <a:srgbClr val="333333"/>
+                          </a:solidFill>
+                          <a:latin typeface="Calibri"/>
+                        </a:defRPr>
+                      </a:pPr>
+                      <a:r>
+                        <a:t>1</a:t>
+                      </a:r>
+                    </a:p>
+                  </a:txBody>
+                  <a:tcPr anchor="t">
+                    <a:solidFill>
+                      <a:srgbClr val="E3F2FD"/>
+                    </a:solidFill>
+                  </a:tcPr>
+                </a:tc>
+                <a:tc>
+                  <a:txBody>
+                    <a:bodyPr wrap="square"/>
+                    <a:lstStyle/>
+                    <a:p>
+                      <a:pPr>
+                        <a:defRPr b="0" sz="1000">
+                          <a:solidFill>
+                            <a:srgbClr val="333333"/>
+                          </a:solidFill>
+                          <a:latin typeface="Calibri"/>
+                        </a:defRPr>
+                      </a:pPr>
+                      <a:r>
+                        <a:t>3</a:t>
+                      </a:r>
+                    </a:p>
+                  </a:txBody>
+                  <a:tcPr anchor="t">
+                    <a:solidFill>
+                      <a:srgbClr val="E3F2FD"/>
+                    </a:solidFill>
+                  </a:tcPr>
+                </a:tc>
+                <a:tc>
+                  <a:txBody>
+                    <a:bodyPr wrap="square"/>
+                    <a:lstStyle/>
+                    <a:p>
+                      <a:pPr>
+                        <a:defRPr b="0" sz="1000">
+                          <a:solidFill>
+                            <a:srgbClr val="333333"/>
+                          </a:solidFill>
+                          <a:latin typeface="Calibri"/>
+                        </a:defRPr>
+                      </a:pPr>
+                      <a:r>
+                        <a:t>3</a:t>
+                      </a:r>
+                    </a:p>
+                  </a:txBody>
+                  <a:tcPr anchor="t">
+                    <a:solidFill>
+                      <a:srgbClr val="E3F2FD"/>
+                    </a:solidFill>
+                  </a:tcPr>
+                </a:tc>
+                <a:tc>
+                  <a:txBody>
+                    <a:bodyPr wrap="square"/>
+                    <a:lstStyle/>
+                    <a:p>
+                      <a:pPr>
+                        <a:defRPr b="0" sz="1000">
+                          <a:solidFill>
+                            <a:srgbClr val="333333"/>
+                          </a:solidFill>
+                          <a:latin typeface="Calibri"/>
+                        </a:defRPr>
+                      </a:pPr>
+                      <a:r>
+                        <a:t>8</a:t>
+                      </a:r>
+                    </a:p>
+                  </a:txBody>
+                  <a:tcPr anchor="t">
+                    <a:solidFill>
+                      <a:srgbClr val="E3F2FD"/>
+                    </a:solidFill>
+                  </a:tcPr>
+                </a:tc>
+              </a:tr>
+              <a:tr h="301752">
+                <a:tc>
+                  <a:txBody>
+                    <a:bodyPr wrap="square"/>
+                    <a:lstStyle/>
+                    <a:p>
+                      <a:pPr>
+                        <a:defRPr b="1" sz="1000">
+                          <a:solidFill>
+                            <a:srgbClr val="1A237E"/>
+                          </a:solidFill>
+                          <a:latin typeface="Calibri"/>
+                        </a:defRPr>
+                      </a:pPr>
+                      <a:r>
+                        <a:t>Vantage</a:t>
+                      </a:r>
+                    </a:p>
+                  </a:txBody>
+                  <a:tcPr anchor="t">
+                    <a:solidFill>
                       <a:srgbClr val="FFFFFF"/>
                     </a:solidFill>
                   </a:tcPr>
@@ -5577,12 +6823,232 @@
                         </a:defRPr>
                       </a:pPr>
                       <a:r>
+                        <a:t>2</a:t>
+                      </a:r>
+                    </a:p>
+                  </a:txBody>
+                  <a:tcPr anchor="t">
+                    <a:solidFill>
+                      <a:srgbClr val="FFFFFF"/>
+                    </a:solidFill>
+                  </a:tcPr>
+                </a:tc>
+                <a:tc>
+                  <a:txBody>
+                    <a:bodyPr wrap="square"/>
+                    <a:lstStyle/>
+                    <a:p>
+                      <a:pPr>
+                        <a:defRPr b="0" sz="1000">
+                          <a:solidFill>
+                            <a:srgbClr val="333333"/>
+                          </a:solidFill>
+                          <a:latin typeface="Calibri"/>
+                        </a:defRPr>
+                      </a:pPr>
+                      <a:r>
+                        <a:t>4</a:t>
+                      </a:r>
+                    </a:p>
+                  </a:txBody>
+                  <a:tcPr anchor="t">
+                    <a:solidFill>
+                      <a:srgbClr val="FFFFFF"/>
+                    </a:solidFill>
+                  </a:tcPr>
+                </a:tc>
+                <a:tc>
+                  <a:txBody>
+                    <a:bodyPr wrap="square"/>
+                    <a:lstStyle/>
+                    <a:p>
+                      <a:pPr>
+                        <a:defRPr b="0" sz="1000">
+                          <a:solidFill>
+                            <a:srgbClr val="333333"/>
+                          </a:solidFill>
+                          <a:latin typeface="Calibri"/>
+                        </a:defRPr>
+                      </a:pPr>
+                      <a:r>
+                        <a:t>8</a:t>
+                      </a:r>
+                    </a:p>
+                  </a:txBody>
+                  <a:tcPr anchor="t">
+                    <a:solidFill>
+                      <a:srgbClr val="FFFFFF"/>
+                    </a:solidFill>
+                  </a:tcPr>
+                </a:tc>
+              </a:tr>
+              <a:tr h="301752">
+                <a:tc>
+                  <a:txBody>
+                    <a:bodyPr wrap="square"/>
+                    <a:lstStyle/>
+                    <a:p>
+                      <a:pPr>
+                        <a:defRPr b="1" sz="1000">
+                          <a:solidFill>
+                            <a:srgbClr val="1A237E"/>
+                          </a:solidFill>
+                          <a:latin typeface="Calibri"/>
+                        </a:defRPr>
+                      </a:pPr>
+                      <a:r>
+                        <a:t>Apptio / IBM</a:t>
+                      </a:r>
+                    </a:p>
+                  </a:txBody>
+                  <a:tcPr anchor="t">
+                    <a:solidFill>
+                      <a:srgbClr val="E3F2FD"/>
+                    </a:solidFill>
+                  </a:tcPr>
+                </a:tc>
+                <a:tc>
+                  <a:txBody>
+                    <a:bodyPr wrap="square"/>
+                    <a:lstStyle/>
+                    <a:p>
+                      <a:pPr>
+                        <a:defRPr b="0" sz="1000">
+                          <a:solidFill>
+                            <a:srgbClr val="333333"/>
+                          </a:solidFill>
+                          <a:latin typeface="Calibri"/>
+                        </a:defRPr>
+                      </a:pPr>
+                      <a:r>
+                        <a:t>1</a:t>
+                      </a:r>
+                    </a:p>
+                  </a:txBody>
+                  <a:tcPr anchor="t">
+                    <a:solidFill>
+                      <a:srgbClr val="E3F2FD"/>
+                    </a:solidFill>
+                  </a:tcPr>
+                </a:tc>
+                <a:tc>
+                  <a:txBody>
+                    <a:bodyPr wrap="square"/>
+                    <a:lstStyle/>
+                    <a:p>
+                      <a:pPr>
+                        <a:defRPr b="0" sz="1000">
+                          <a:solidFill>
+                            <a:srgbClr val="333333"/>
+                          </a:solidFill>
+                          <a:latin typeface="Calibri"/>
+                        </a:defRPr>
+                      </a:pPr>
+                      <a:r>
+                        <a:t>1</a:t>
+                      </a:r>
+                    </a:p>
+                  </a:txBody>
+                  <a:tcPr anchor="t">
+                    <a:solidFill>
+                      <a:srgbClr val="E3F2FD"/>
+                    </a:solidFill>
+                  </a:tcPr>
+                </a:tc>
+                <a:tc>
+                  <a:txBody>
+                    <a:bodyPr wrap="square"/>
+                    <a:lstStyle/>
+                    <a:p>
+                      <a:pPr>
+                        <a:defRPr b="0" sz="1000">
+                          <a:solidFill>
+                            <a:srgbClr val="333333"/>
+                          </a:solidFill>
+                          <a:latin typeface="Calibri"/>
+                        </a:defRPr>
+                      </a:pPr>
+                      <a:r>
+                        <a:t>2</a:t>
+                      </a:r>
+                    </a:p>
+                  </a:txBody>
+                  <a:tcPr anchor="t">
+                    <a:solidFill>
+                      <a:srgbClr val="E3F2FD"/>
+                    </a:solidFill>
+                  </a:tcPr>
+                </a:tc>
+                <a:tc>
+                  <a:txBody>
+                    <a:bodyPr wrap="square"/>
+                    <a:lstStyle/>
+                    <a:p>
+                      <a:pPr>
+                        <a:defRPr b="0" sz="1000">
+                          <a:solidFill>
+                            <a:srgbClr val="333333"/>
+                          </a:solidFill>
+                          <a:latin typeface="Calibri"/>
+                        </a:defRPr>
+                      </a:pPr>
+                      <a:r>
                         <a:t>3</a:t>
                       </a:r>
                     </a:p>
                   </a:txBody>
                   <a:tcPr anchor="t">
                     <a:solidFill>
+                      <a:srgbClr val="E3F2FD"/>
+                    </a:solidFill>
+                  </a:tcPr>
+                </a:tc>
+                <a:tc>
+                  <a:txBody>
+                    <a:bodyPr wrap="square"/>
+                    <a:lstStyle/>
+                    <a:p>
+                      <a:pPr>
+                        <a:defRPr b="0" sz="1000">
+                          <a:solidFill>
+                            <a:srgbClr val="333333"/>
+                          </a:solidFill>
+                          <a:latin typeface="Calibri"/>
+                        </a:defRPr>
+                      </a:pPr>
+                      <a:r>
+                        <a:t>7</a:t>
+                      </a:r>
+                    </a:p>
+                  </a:txBody>
+                  <a:tcPr anchor="t">
+                    <a:solidFill>
+                      <a:srgbClr val="E3F2FD"/>
+                    </a:solidFill>
+                  </a:tcPr>
+                </a:tc>
+              </a:tr>
+              <a:tr h="301752">
+                <a:tc>
+                  <a:txBody>
+                    <a:bodyPr wrap="square"/>
+                    <a:lstStyle/>
+                    <a:p>
+                      <a:pPr>
+                        <a:defRPr b="1" sz="1000">
+                          <a:solidFill>
+                            <a:srgbClr val="1A237E"/>
+                          </a:solidFill>
+                          <a:latin typeface="Calibri"/>
+                        </a:defRPr>
+                      </a:pPr>
+                      <a:r>
+                        <a:t>Harness CCM</a:t>
+                      </a:r>
+                    </a:p>
+                  </a:txBody>
+                  <a:tcPr anchor="t">
+                    <a:solidFill>
                       <a:srgbClr val="FFFFFF"/>
                     </a:solidFill>
                   </a:tcPr>
@@ -5601,6 +7067,78 @@
                         </a:defRPr>
                       </a:pPr>
                       <a:r>
+                        <a:t>1</a:t>
+                      </a:r>
+                    </a:p>
+                  </a:txBody>
+                  <a:tcPr anchor="t">
+                    <a:solidFill>
+                      <a:srgbClr val="FFFFFF"/>
+                    </a:solidFill>
+                  </a:tcPr>
+                </a:tc>
+                <a:tc>
+                  <a:txBody>
+                    <a:bodyPr wrap="square"/>
+                    <a:lstStyle/>
+                    <a:p>
+                      <a:pPr>
+                        <a:defRPr b="0" sz="1000">
+                          <a:solidFill>
+                            <a:srgbClr val="333333"/>
+                          </a:solidFill>
+                          <a:latin typeface="Calibri"/>
+                        </a:defRPr>
+                      </a:pPr>
+                      <a:r>
+                        <a:t>1</a:t>
+                      </a:r>
+                    </a:p>
+                  </a:txBody>
+                  <a:tcPr anchor="t">
+                    <a:solidFill>
+                      <a:srgbClr val="FFFFFF"/>
+                    </a:solidFill>
+                  </a:tcPr>
+                </a:tc>
+                <a:tc>
+                  <a:txBody>
+                    <a:bodyPr wrap="square"/>
+                    <a:lstStyle/>
+                    <a:p>
+                      <a:pPr>
+                        <a:defRPr b="0" sz="1000">
+                          <a:solidFill>
+                            <a:srgbClr val="333333"/>
+                          </a:solidFill>
+                          <a:latin typeface="Calibri"/>
+                        </a:defRPr>
+                      </a:pPr>
+                      <a:r>
+                        <a:t>2</a:t>
+                      </a:r>
+                    </a:p>
+                  </a:txBody>
+                  <a:tcPr anchor="t">
+                    <a:solidFill>
+                      <a:srgbClr val="FFFFFF"/>
+                    </a:solidFill>
+                  </a:tcPr>
+                </a:tc>
+                <a:tc>
+                  <a:txBody>
+                    <a:bodyPr wrap="square"/>
+                    <a:lstStyle/>
+                    <a:p>
+                      <a:pPr>
+                        <a:defRPr b="0" sz="1000">
+                          <a:solidFill>
+                            <a:srgbClr val="333333"/>
+                          </a:solidFill>
+                          <a:latin typeface="Calibri"/>
+                        </a:defRPr>
+                      </a:pPr>
+                      <a:r>
                         <a:t>3</a:t>
                       </a:r>
                     </a:p>
@@ -5625,889 +7163,451 @@
                         </a:defRPr>
                       </a:pPr>
                       <a:r>
+                        <a:t>7</a:t>
+                      </a:r>
+                    </a:p>
+                  </a:txBody>
+                  <a:tcPr anchor="t">
+                    <a:solidFill>
+                      <a:srgbClr val="FFFFFF"/>
+                    </a:solidFill>
+                  </a:tcPr>
+                </a:tc>
+              </a:tr>
+              <a:tr h="301752">
+                <a:tc>
+                  <a:txBody>
+                    <a:bodyPr wrap="square"/>
+                    <a:lstStyle/>
+                    <a:p>
+                      <a:pPr>
+                        <a:defRPr b="1" sz="1000">
+                          <a:solidFill>
+                            <a:srgbClr val="1A237E"/>
+                          </a:solidFill>
+                          <a:latin typeface="Calibri"/>
+                        </a:defRPr>
+                      </a:pPr>
+                      <a:r>
+                        <a:t>CloudHealth</a:t>
+                      </a:r>
+                    </a:p>
+                  </a:txBody>
+                  <a:tcPr anchor="t">
+                    <a:solidFill>
+                      <a:srgbClr val="E3F2FD"/>
+                    </a:solidFill>
+                  </a:tcPr>
+                </a:tc>
+                <a:tc>
+                  <a:txBody>
+                    <a:bodyPr wrap="square"/>
+                    <a:lstStyle/>
+                    <a:p>
+                      <a:pPr>
+                        <a:defRPr b="0" sz="1000">
+                          <a:solidFill>
+                            <a:srgbClr val="333333"/>
+                          </a:solidFill>
+                          <a:latin typeface="Calibri"/>
+                        </a:defRPr>
+                      </a:pPr>
+                      <a:r>
+                        <a:t>1</a:t>
+                      </a:r>
+                    </a:p>
+                  </a:txBody>
+                  <a:tcPr anchor="t">
+                    <a:solidFill>
+                      <a:srgbClr val="E3F2FD"/>
+                    </a:solidFill>
+                  </a:tcPr>
+                </a:tc>
+                <a:tc>
+                  <a:txBody>
+                    <a:bodyPr wrap="square"/>
+                    <a:lstStyle/>
+                    <a:p>
+                      <a:pPr>
+                        <a:defRPr b="0" sz="1000">
+                          <a:solidFill>
+                            <a:srgbClr val="333333"/>
+                          </a:solidFill>
+                          <a:latin typeface="Calibri"/>
+                        </a:defRPr>
+                      </a:pPr>
+                      <a:r>
+                        <a:t>1</a:t>
+                      </a:r>
+                    </a:p>
+                  </a:txBody>
+                  <a:tcPr anchor="t">
+                    <a:solidFill>
+                      <a:srgbClr val="E3F2FD"/>
+                    </a:solidFill>
+                  </a:tcPr>
+                </a:tc>
+                <a:tc>
+                  <a:txBody>
+                    <a:bodyPr wrap="square"/>
+                    <a:lstStyle/>
+                    <a:p>
+                      <a:pPr>
+                        <a:defRPr b="0" sz="1000">
+                          <a:solidFill>
+                            <a:srgbClr val="333333"/>
+                          </a:solidFill>
+                          <a:latin typeface="Calibri"/>
+                        </a:defRPr>
+                      </a:pPr>
+                      <a:r>
+                        <a:t>1</a:t>
+                      </a:r>
+                    </a:p>
+                  </a:txBody>
+                  <a:tcPr anchor="t">
+                    <a:solidFill>
+                      <a:srgbClr val="E3F2FD"/>
+                    </a:solidFill>
+                  </a:tcPr>
+                </a:tc>
+                <a:tc>
+                  <a:txBody>
+                    <a:bodyPr wrap="square"/>
+                    <a:lstStyle/>
+                    <a:p>
+                      <a:pPr>
+                        <a:defRPr b="0" sz="1000">
+                          <a:solidFill>
+                            <a:srgbClr val="333333"/>
+                          </a:solidFill>
+                          <a:latin typeface="Calibri"/>
+                        </a:defRPr>
+                      </a:pPr>
+                      <a:r>
+                        <a:t>4</a:t>
+                      </a:r>
+                    </a:p>
+                  </a:txBody>
+                  <a:tcPr anchor="t">
+                    <a:solidFill>
+                      <a:srgbClr val="E3F2FD"/>
+                    </a:solidFill>
+                  </a:tcPr>
+                </a:tc>
+                <a:tc>
+                  <a:txBody>
+                    <a:bodyPr wrap="square"/>
+                    <a:lstStyle/>
+                    <a:p>
+                      <a:pPr>
+                        <a:defRPr b="0" sz="1000">
+                          <a:solidFill>
+                            <a:srgbClr val="333333"/>
+                          </a:solidFill>
+                          <a:latin typeface="Calibri"/>
+                        </a:defRPr>
+                      </a:pPr>
+                      <a:r>
+                        <a:t>7</a:t>
+                      </a:r>
+                    </a:p>
+                  </a:txBody>
+                  <a:tcPr anchor="t">
+                    <a:solidFill>
+                      <a:srgbClr val="E3F2FD"/>
+                    </a:solidFill>
+                  </a:tcPr>
+                </a:tc>
+              </a:tr>
+              <a:tr h="301752">
+                <a:tc>
+                  <a:txBody>
+                    <a:bodyPr wrap="square"/>
+                    <a:lstStyle/>
+                    <a:p>
+                      <a:pPr>
+                        <a:defRPr b="1" sz="1000">
+                          <a:solidFill>
+                            <a:srgbClr val="1A237E"/>
+                          </a:solidFill>
+                          <a:latin typeface="Calibri"/>
+                        </a:defRPr>
+                      </a:pPr>
+                      <a:r>
+                        <a:t>Cast AI</a:t>
+                      </a:r>
+                    </a:p>
+                  </a:txBody>
+                  <a:tcPr anchor="t">
+                    <a:solidFill>
+                      <a:srgbClr val="FFFFFF"/>
+                    </a:solidFill>
+                  </a:tcPr>
+                </a:tc>
+                <a:tc>
+                  <a:txBody>
+                    <a:bodyPr wrap="square"/>
+                    <a:lstStyle/>
+                    <a:p>
+                      <a:pPr>
+                        <a:defRPr b="0" sz="1000">
+                          <a:solidFill>
+                            <a:srgbClr val="333333"/>
+                          </a:solidFill>
+                          <a:latin typeface="Calibri"/>
+                        </a:defRPr>
+                      </a:pPr>
+                      <a:r>
+                        <a:t>1</a:t>
+                      </a:r>
+                    </a:p>
+                  </a:txBody>
+                  <a:tcPr anchor="t">
+                    <a:solidFill>
+                      <a:srgbClr val="FFFFFF"/>
+                    </a:solidFill>
+                  </a:tcPr>
+                </a:tc>
+                <a:tc>
+                  <a:txBody>
+                    <a:bodyPr wrap="square"/>
+                    <a:lstStyle/>
+                    <a:p>
+                      <a:pPr>
+                        <a:defRPr b="0" sz="1000">
+                          <a:solidFill>
+                            <a:srgbClr val="333333"/>
+                          </a:solidFill>
+                          <a:latin typeface="Calibri"/>
+                        </a:defRPr>
+                      </a:pPr>
+                      <a:r>
+                        <a:t>1</a:t>
+                      </a:r>
+                    </a:p>
+                  </a:txBody>
+                  <a:tcPr anchor="t">
+                    <a:solidFill>
+                      <a:srgbClr val="FFFFFF"/>
+                    </a:solidFill>
+                  </a:tcPr>
+                </a:tc>
+                <a:tc>
+                  <a:txBody>
+                    <a:bodyPr wrap="square"/>
+                    <a:lstStyle/>
+                    <a:p>
+                      <a:pPr>
+                        <a:defRPr b="0" sz="1000">
+                          <a:solidFill>
+                            <a:srgbClr val="333333"/>
+                          </a:solidFill>
+                          <a:latin typeface="Calibri"/>
+                        </a:defRPr>
+                      </a:pPr>
+                      <a:r>
+                        <a:t>1</a:t>
+                      </a:r>
+                    </a:p>
+                  </a:txBody>
+                  <a:tcPr anchor="t">
+                    <a:solidFill>
+                      <a:srgbClr val="FFFFFF"/>
+                    </a:solidFill>
+                  </a:tcPr>
+                </a:tc>
+                <a:tc>
+                  <a:txBody>
+                    <a:bodyPr wrap="square"/>
+                    <a:lstStyle/>
+                    <a:p>
+                      <a:pPr>
+                        <a:defRPr b="0" sz="1000">
+                          <a:solidFill>
+                            <a:srgbClr val="333333"/>
+                          </a:solidFill>
+                          <a:latin typeface="Calibri"/>
+                        </a:defRPr>
+                      </a:pPr>
+                      <a:r>
+                        <a:t>3</a:t>
+                      </a:r>
+                    </a:p>
+                  </a:txBody>
+                  <a:tcPr anchor="t">
+                    <a:solidFill>
+                      <a:srgbClr val="FFFFFF"/>
+                    </a:solidFill>
+                  </a:tcPr>
+                </a:tc>
+                <a:tc>
+                  <a:txBody>
+                    <a:bodyPr wrap="square"/>
+                    <a:lstStyle/>
+                    <a:p>
+                      <a:pPr>
+                        <a:defRPr b="0" sz="1000">
+                          <a:solidFill>
+                            <a:srgbClr val="333333"/>
+                          </a:solidFill>
+                          <a:latin typeface="Calibri"/>
+                        </a:defRPr>
+                      </a:pPr>
+                      <a:r>
+                        <a:t>6</a:t>
+                      </a:r>
+                    </a:p>
+                  </a:txBody>
+                  <a:tcPr anchor="t">
+                    <a:solidFill>
+                      <a:srgbClr val="FFFFFF"/>
+                    </a:solidFill>
+                  </a:tcPr>
+                </a:tc>
+              </a:tr>
+              <a:tr h="301752">
+                <a:tc>
+                  <a:txBody>
+                    <a:bodyPr wrap="square"/>
+                    <a:lstStyle/>
+                    <a:p>
+                      <a:pPr>
+                        <a:defRPr b="1" sz="1000">
+                          <a:solidFill>
+                            <a:srgbClr val="1A237E"/>
+                          </a:solidFill>
+                          <a:latin typeface="Calibri"/>
+                        </a:defRPr>
+                      </a:pPr>
+                      <a:r>
+                        <a:t>Azure / AWS Native</a:t>
+                      </a:r>
+                    </a:p>
+                  </a:txBody>
+                  <a:tcPr anchor="t">
+                    <a:solidFill>
+                      <a:srgbClr val="E3F2FD"/>
+                    </a:solidFill>
+                  </a:tcPr>
+                </a:tc>
+                <a:tc>
+                  <a:txBody>
+                    <a:bodyPr wrap="square"/>
+                    <a:lstStyle/>
+                    <a:p>
+                      <a:pPr>
+                        <a:defRPr b="0" sz="1000">
+                          <a:solidFill>
+                            <a:srgbClr val="333333"/>
+                          </a:solidFill>
+                          <a:latin typeface="Calibri"/>
+                        </a:defRPr>
+                      </a:pPr>
+                      <a:r>
+                        <a:t>2</a:t>
+                      </a:r>
+                    </a:p>
+                  </a:txBody>
+                  <a:tcPr anchor="t">
+                    <a:solidFill>
+                      <a:srgbClr val="E3F2FD"/>
+                    </a:solidFill>
+                  </a:tcPr>
+                </a:tc>
+                <a:tc>
+                  <a:txBody>
+                    <a:bodyPr wrap="square"/>
+                    <a:lstStyle/>
+                    <a:p>
+                      <a:pPr>
+                        <a:defRPr b="0" sz="1000">
+                          <a:solidFill>
+                            <a:srgbClr val="333333"/>
+                          </a:solidFill>
+                          <a:latin typeface="Calibri"/>
+                        </a:defRPr>
+                      </a:pPr>
+                      <a:r>
+                        <a:t>3</a:t>
+                      </a:r>
+                    </a:p>
+                  </a:txBody>
+                  <a:tcPr anchor="t">
+                    <a:solidFill>
+                      <a:srgbClr val="E3F2FD"/>
+                    </a:solidFill>
+                  </a:tcPr>
+                </a:tc>
+                <a:tc>
+                  <a:txBody>
+                    <a:bodyPr wrap="square"/>
+                    <a:lstStyle/>
+                    <a:p>
+                      <a:pPr>
+                        <a:defRPr b="0" sz="1000">
+                          <a:solidFill>
+                            <a:srgbClr val="333333"/>
+                          </a:solidFill>
+                          <a:latin typeface="Calibri"/>
+                        </a:defRPr>
+                      </a:pPr>
+                      <a:r>
+                        <a:t>1</a:t>
+                      </a:r>
+                    </a:p>
+                  </a:txBody>
+                  <a:tcPr anchor="t">
+                    <a:solidFill>
+                      <a:srgbClr val="E3F2FD"/>
+                    </a:solidFill>
+                  </a:tcPr>
+                </a:tc>
+                <a:tc>
+                  <a:txBody>
+                    <a:bodyPr wrap="square"/>
+                    <a:lstStyle/>
+                    <a:p>
+                      <a:pPr>
+                        <a:defRPr b="0" sz="1000">
+                          <a:solidFill>
+                            <a:srgbClr val="333333"/>
+                          </a:solidFill>
+                          <a:latin typeface="Calibri"/>
+                        </a:defRPr>
+                      </a:pPr>
+                      <a:r>
+                        <a:t>2</a:t>
+                      </a:r>
+                    </a:p>
+                  </a:txBody>
+                  <a:tcPr anchor="t">
+                    <a:solidFill>
+                      <a:srgbClr val="E3F2FD"/>
+                    </a:solidFill>
+                  </a:tcPr>
+                </a:tc>
+                <a:tc>
+                  <a:txBody>
+                    <a:bodyPr wrap="square"/>
+                    <a:lstStyle/>
+                    <a:p>
+                      <a:pPr>
+                        <a:defRPr b="0" sz="1000">
+                          <a:solidFill>
+                            <a:srgbClr val="333333"/>
+                          </a:solidFill>
+                          <a:latin typeface="Calibri"/>
+                        </a:defRPr>
+                      </a:pPr>
+                      <a:r>
                         <a:t>8</a:t>
                       </a:r>
                     </a:p>
                   </a:txBody>
                   <a:tcPr anchor="t">
                     <a:solidFill>
-                      <a:srgbClr val="FFFFFF"/>
-                    </a:solidFill>
-                  </a:tcPr>
-                </a:tc>
-              </a:tr>
-              <a:tr h="365760">
-                <a:tc>
-                  <a:txBody>
-                    <a:bodyPr wrap="square"/>
-                    <a:lstStyle/>
-                    <a:p>
-                      <a:pPr>
-                        <a:defRPr b="1" sz="1000">
-                          <a:solidFill>
-                            <a:srgbClr val="1A237E"/>
-                          </a:solidFill>
-                          <a:latin typeface="Calibri"/>
-                        </a:defRPr>
-                      </a:pPr>
-                      <a:r>
-                        <a:t>Vantage</a:t>
-                      </a:r>
-                    </a:p>
-                  </a:txBody>
-                  <a:tcPr anchor="t">
-                    <a:solidFill>
                       <a:srgbClr val="E3F2FD"/>
-                    </a:solidFill>
-                  </a:tcPr>
-                </a:tc>
-                <a:tc>
-                  <a:txBody>
-                    <a:bodyPr wrap="square"/>
-                    <a:lstStyle/>
-                    <a:p>
-                      <a:pPr>
-                        <a:defRPr b="0" sz="1000">
-                          <a:solidFill>
-                            <a:srgbClr val="333333"/>
-                          </a:solidFill>
-                          <a:latin typeface="Calibri"/>
-                        </a:defRPr>
-                      </a:pPr>
-                      <a:r>
-                        <a:t>1</a:t>
-                      </a:r>
-                    </a:p>
-                  </a:txBody>
-                  <a:tcPr anchor="t">
-                    <a:solidFill>
-                      <a:srgbClr val="E3F2FD"/>
-                    </a:solidFill>
-                  </a:tcPr>
-                </a:tc>
-                <a:tc>
-                  <a:txBody>
-                    <a:bodyPr wrap="square"/>
-                    <a:lstStyle/>
-                    <a:p>
-                      <a:pPr>
-                        <a:defRPr b="0" sz="1000">
-                          <a:solidFill>
-                            <a:srgbClr val="333333"/>
-                          </a:solidFill>
-                          <a:latin typeface="Calibri"/>
-                        </a:defRPr>
-                      </a:pPr>
-                      <a:r>
-                        <a:t>1</a:t>
-                      </a:r>
-                    </a:p>
-                  </a:txBody>
-                  <a:tcPr anchor="t">
-                    <a:solidFill>
-                      <a:srgbClr val="E3F2FD"/>
-                    </a:solidFill>
-                  </a:tcPr>
-                </a:tc>
-                <a:tc>
-                  <a:txBody>
-                    <a:bodyPr wrap="square"/>
-                    <a:lstStyle/>
-                    <a:p>
-                      <a:pPr>
-                        <a:defRPr b="0" sz="1000">
-                          <a:solidFill>
-                            <a:srgbClr val="333333"/>
-                          </a:solidFill>
-                          <a:latin typeface="Calibri"/>
-                        </a:defRPr>
-                      </a:pPr>
-                      <a:r>
-                        <a:t>2</a:t>
-                      </a:r>
-                    </a:p>
-                  </a:txBody>
-                  <a:tcPr anchor="t">
-                    <a:solidFill>
-                      <a:srgbClr val="E3F2FD"/>
-                    </a:solidFill>
-                  </a:tcPr>
-                </a:tc>
-                <a:tc>
-                  <a:txBody>
-                    <a:bodyPr wrap="square"/>
-                    <a:lstStyle/>
-                    <a:p>
-                      <a:pPr>
-                        <a:defRPr b="0" sz="1000">
-                          <a:solidFill>
-                            <a:srgbClr val="333333"/>
-                          </a:solidFill>
-                          <a:latin typeface="Calibri"/>
-                        </a:defRPr>
-                      </a:pPr>
-                      <a:r>
-                        <a:t>4</a:t>
-                      </a:r>
-                    </a:p>
-                  </a:txBody>
-                  <a:tcPr anchor="t">
-                    <a:solidFill>
-                      <a:srgbClr val="E3F2FD"/>
-                    </a:solidFill>
-                  </a:tcPr>
-                </a:tc>
-                <a:tc>
-                  <a:txBody>
-                    <a:bodyPr wrap="square"/>
-                    <a:lstStyle/>
-                    <a:p>
-                      <a:pPr>
-                        <a:defRPr b="0" sz="1000">
-                          <a:solidFill>
-                            <a:srgbClr val="333333"/>
-                          </a:solidFill>
-                          <a:latin typeface="Calibri"/>
-                        </a:defRPr>
-                      </a:pPr>
-                      <a:r>
-                        <a:t>8</a:t>
-                      </a:r>
-                    </a:p>
-                  </a:txBody>
-                  <a:tcPr anchor="t">
-                    <a:solidFill>
-                      <a:srgbClr val="E3F2FD"/>
-                    </a:solidFill>
-                  </a:tcPr>
-                </a:tc>
-              </a:tr>
-              <a:tr h="365760">
-                <a:tc>
-                  <a:txBody>
-                    <a:bodyPr wrap="square"/>
-                    <a:lstStyle/>
-                    <a:p>
-                      <a:pPr>
-                        <a:defRPr b="1" sz="1000">
-                          <a:solidFill>
-                            <a:srgbClr val="1A237E"/>
-                          </a:solidFill>
-                          <a:latin typeface="Calibri"/>
-                        </a:defRPr>
-                      </a:pPr>
-                      <a:r>
-                        <a:t>Apptio / IBM</a:t>
-                      </a:r>
-                    </a:p>
-                  </a:txBody>
-                  <a:tcPr anchor="t">
-                    <a:solidFill>
-                      <a:srgbClr val="FFFFFF"/>
-                    </a:solidFill>
-                  </a:tcPr>
-                </a:tc>
-                <a:tc>
-                  <a:txBody>
-                    <a:bodyPr wrap="square"/>
-                    <a:lstStyle/>
-                    <a:p>
-                      <a:pPr>
-                        <a:defRPr b="0" sz="1000">
-                          <a:solidFill>
-                            <a:srgbClr val="333333"/>
-                          </a:solidFill>
-                          <a:latin typeface="Calibri"/>
-                        </a:defRPr>
-                      </a:pPr>
-                      <a:r>
-                        <a:t>1</a:t>
-                      </a:r>
-                    </a:p>
-                  </a:txBody>
-                  <a:tcPr anchor="t">
-                    <a:solidFill>
-                      <a:srgbClr val="FFFFFF"/>
-                    </a:solidFill>
-                  </a:tcPr>
-                </a:tc>
-                <a:tc>
-                  <a:txBody>
-                    <a:bodyPr wrap="square"/>
-                    <a:lstStyle/>
-                    <a:p>
-                      <a:pPr>
-                        <a:defRPr b="0" sz="1000">
-                          <a:solidFill>
-                            <a:srgbClr val="333333"/>
-                          </a:solidFill>
-                          <a:latin typeface="Calibri"/>
-                        </a:defRPr>
-                      </a:pPr>
-                      <a:r>
-                        <a:t>1</a:t>
-                      </a:r>
-                    </a:p>
-                  </a:txBody>
-                  <a:tcPr anchor="t">
-                    <a:solidFill>
-                      <a:srgbClr val="FFFFFF"/>
-                    </a:solidFill>
-                  </a:tcPr>
-                </a:tc>
-                <a:tc>
-                  <a:txBody>
-                    <a:bodyPr wrap="square"/>
-                    <a:lstStyle/>
-                    <a:p>
-                      <a:pPr>
-                        <a:defRPr b="0" sz="1000">
-                          <a:solidFill>
-                            <a:srgbClr val="333333"/>
-                          </a:solidFill>
-                          <a:latin typeface="Calibri"/>
-                        </a:defRPr>
-                      </a:pPr>
-                      <a:r>
-                        <a:t>2</a:t>
-                      </a:r>
-                    </a:p>
-                  </a:txBody>
-                  <a:tcPr anchor="t">
-                    <a:solidFill>
-                      <a:srgbClr val="FFFFFF"/>
-                    </a:solidFill>
-                  </a:tcPr>
-                </a:tc>
-                <a:tc>
-                  <a:txBody>
-                    <a:bodyPr wrap="square"/>
-                    <a:lstStyle/>
-                    <a:p>
-                      <a:pPr>
-                        <a:defRPr b="0" sz="1000">
-                          <a:solidFill>
-                            <a:srgbClr val="333333"/>
-                          </a:solidFill>
-                          <a:latin typeface="Calibri"/>
-                        </a:defRPr>
-                      </a:pPr>
-                      <a:r>
-                        <a:t>3</a:t>
-                      </a:r>
-                    </a:p>
-                  </a:txBody>
-                  <a:tcPr anchor="t">
-                    <a:solidFill>
-                      <a:srgbClr val="FFFFFF"/>
-                    </a:solidFill>
-                  </a:tcPr>
-                </a:tc>
-                <a:tc>
-                  <a:txBody>
-                    <a:bodyPr wrap="square"/>
-                    <a:lstStyle/>
-                    <a:p>
-                      <a:pPr>
-                        <a:defRPr b="0" sz="1000">
-                          <a:solidFill>
-                            <a:srgbClr val="333333"/>
-                          </a:solidFill>
-                          <a:latin typeface="Calibri"/>
-                        </a:defRPr>
-                      </a:pPr>
-                      <a:r>
-                        <a:t>7</a:t>
-                      </a:r>
-                    </a:p>
-                  </a:txBody>
-                  <a:tcPr anchor="t">
-                    <a:solidFill>
-                      <a:srgbClr val="FFFFFF"/>
-                    </a:solidFill>
-                  </a:tcPr>
-                </a:tc>
-              </a:tr>
-              <a:tr h="365760">
-                <a:tc>
-                  <a:txBody>
-                    <a:bodyPr wrap="square"/>
-                    <a:lstStyle/>
-                    <a:p>
-                      <a:pPr>
-                        <a:defRPr b="1" sz="1000">
-                          <a:solidFill>
-                            <a:srgbClr val="1A237E"/>
-                          </a:solidFill>
-                          <a:latin typeface="Calibri"/>
-                        </a:defRPr>
-                      </a:pPr>
-                      <a:r>
-                        <a:t>Harness CCM</a:t>
-                      </a:r>
-                    </a:p>
-                  </a:txBody>
-                  <a:tcPr anchor="t">
-                    <a:solidFill>
-                      <a:srgbClr val="E3F2FD"/>
-                    </a:solidFill>
-                  </a:tcPr>
-                </a:tc>
-                <a:tc>
-                  <a:txBody>
-                    <a:bodyPr wrap="square"/>
-                    <a:lstStyle/>
-                    <a:p>
-                      <a:pPr>
-                        <a:defRPr b="0" sz="1000">
-                          <a:solidFill>
-                            <a:srgbClr val="333333"/>
-                          </a:solidFill>
-                          <a:latin typeface="Calibri"/>
-                        </a:defRPr>
-                      </a:pPr>
-                      <a:r>
-                        <a:t>1</a:t>
-                      </a:r>
-                    </a:p>
-                  </a:txBody>
-                  <a:tcPr anchor="t">
-                    <a:solidFill>
-                      <a:srgbClr val="E3F2FD"/>
-                    </a:solidFill>
-                  </a:tcPr>
-                </a:tc>
-                <a:tc>
-                  <a:txBody>
-                    <a:bodyPr wrap="square"/>
-                    <a:lstStyle/>
-                    <a:p>
-                      <a:pPr>
-                        <a:defRPr b="0" sz="1000">
-                          <a:solidFill>
-                            <a:srgbClr val="333333"/>
-                          </a:solidFill>
-                          <a:latin typeface="Calibri"/>
-                        </a:defRPr>
-                      </a:pPr>
-                      <a:r>
-                        <a:t>1</a:t>
-                      </a:r>
-                    </a:p>
-                  </a:txBody>
-                  <a:tcPr anchor="t">
-                    <a:solidFill>
-                      <a:srgbClr val="E3F2FD"/>
-                    </a:solidFill>
-                  </a:tcPr>
-                </a:tc>
-                <a:tc>
-                  <a:txBody>
-                    <a:bodyPr wrap="square"/>
-                    <a:lstStyle/>
-                    <a:p>
-                      <a:pPr>
-                        <a:defRPr b="0" sz="1000">
-                          <a:solidFill>
-                            <a:srgbClr val="333333"/>
-                          </a:solidFill>
-                          <a:latin typeface="Calibri"/>
-                        </a:defRPr>
-                      </a:pPr>
-                      <a:r>
-                        <a:t>2</a:t>
-                      </a:r>
-                    </a:p>
-                  </a:txBody>
-                  <a:tcPr anchor="t">
-                    <a:solidFill>
-                      <a:srgbClr val="E3F2FD"/>
-                    </a:solidFill>
-                  </a:tcPr>
-                </a:tc>
-                <a:tc>
-                  <a:txBody>
-                    <a:bodyPr wrap="square"/>
-                    <a:lstStyle/>
-                    <a:p>
-                      <a:pPr>
-                        <a:defRPr b="0" sz="1000">
-                          <a:solidFill>
-                            <a:srgbClr val="333333"/>
-                          </a:solidFill>
-                          <a:latin typeface="Calibri"/>
-                        </a:defRPr>
-                      </a:pPr>
-                      <a:r>
-                        <a:t>3</a:t>
-                      </a:r>
-                    </a:p>
-                  </a:txBody>
-                  <a:tcPr anchor="t">
-                    <a:solidFill>
-                      <a:srgbClr val="E3F2FD"/>
-                    </a:solidFill>
-                  </a:tcPr>
-                </a:tc>
-                <a:tc>
-                  <a:txBody>
-                    <a:bodyPr wrap="square"/>
-                    <a:lstStyle/>
-                    <a:p>
-                      <a:pPr>
-                        <a:defRPr b="0" sz="1000">
-                          <a:solidFill>
-                            <a:srgbClr val="333333"/>
-                          </a:solidFill>
-                          <a:latin typeface="Calibri"/>
-                        </a:defRPr>
-                      </a:pPr>
-                      <a:r>
-                        <a:t>7</a:t>
-                      </a:r>
-                    </a:p>
-                  </a:txBody>
-                  <a:tcPr anchor="t">
-                    <a:solidFill>
-                      <a:srgbClr val="E3F2FD"/>
-                    </a:solidFill>
-                  </a:tcPr>
-                </a:tc>
-              </a:tr>
-              <a:tr h="365760">
-                <a:tc>
-                  <a:txBody>
-                    <a:bodyPr wrap="square"/>
-                    <a:lstStyle/>
-                    <a:p>
-                      <a:pPr>
-                        <a:defRPr b="1" sz="1000">
-                          <a:solidFill>
-                            <a:srgbClr val="1A237E"/>
-                          </a:solidFill>
-                          <a:latin typeface="Calibri"/>
-                        </a:defRPr>
-                      </a:pPr>
-                      <a:r>
-                        <a:t>CloudHealth</a:t>
-                      </a:r>
-                    </a:p>
-                  </a:txBody>
-                  <a:tcPr anchor="t">
-                    <a:solidFill>
-                      <a:srgbClr val="FFFFFF"/>
-                    </a:solidFill>
-                  </a:tcPr>
-                </a:tc>
-                <a:tc>
-                  <a:txBody>
-                    <a:bodyPr wrap="square"/>
-                    <a:lstStyle/>
-                    <a:p>
-                      <a:pPr>
-                        <a:defRPr b="0" sz="1000">
-                          <a:solidFill>
-                            <a:srgbClr val="333333"/>
-                          </a:solidFill>
-                          <a:latin typeface="Calibri"/>
-                        </a:defRPr>
-                      </a:pPr>
-                      <a:r>
-                        <a:t>1</a:t>
-                      </a:r>
-                    </a:p>
-                  </a:txBody>
-                  <a:tcPr anchor="t">
-                    <a:solidFill>
-                      <a:srgbClr val="FFFFFF"/>
-                    </a:solidFill>
-                  </a:tcPr>
-                </a:tc>
-                <a:tc>
-                  <a:txBody>
-                    <a:bodyPr wrap="square"/>
-                    <a:lstStyle/>
-                    <a:p>
-                      <a:pPr>
-                        <a:defRPr b="0" sz="1000">
-                          <a:solidFill>
-                            <a:srgbClr val="333333"/>
-                          </a:solidFill>
-                          <a:latin typeface="Calibri"/>
-                        </a:defRPr>
-                      </a:pPr>
-                      <a:r>
-                        <a:t>1</a:t>
-                      </a:r>
-                    </a:p>
-                  </a:txBody>
-                  <a:tcPr anchor="t">
-                    <a:solidFill>
-                      <a:srgbClr val="FFFFFF"/>
-                    </a:solidFill>
-                  </a:tcPr>
-                </a:tc>
-                <a:tc>
-                  <a:txBody>
-                    <a:bodyPr wrap="square"/>
-                    <a:lstStyle/>
-                    <a:p>
-                      <a:pPr>
-                        <a:defRPr b="0" sz="1000">
-                          <a:solidFill>
-                            <a:srgbClr val="333333"/>
-                          </a:solidFill>
-                          <a:latin typeface="Calibri"/>
-                        </a:defRPr>
-                      </a:pPr>
-                      <a:r>
-                        <a:t>1</a:t>
-                      </a:r>
-                    </a:p>
-                  </a:txBody>
-                  <a:tcPr anchor="t">
-                    <a:solidFill>
-                      <a:srgbClr val="FFFFFF"/>
-                    </a:solidFill>
-                  </a:tcPr>
-                </a:tc>
-                <a:tc>
-                  <a:txBody>
-                    <a:bodyPr wrap="square"/>
-                    <a:lstStyle/>
-                    <a:p>
-                      <a:pPr>
-                        <a:defRPr b="0" sz="1000">
-                          <a:solidFill>
-                            <a:srgbClr val="333333"/>
-                          </a:solidFill>
-                          <a:latin typeface="Calibri"/>
-                        </a:defRPr>
-                      </a:pPr>
-                      <a:r>
-                        <a:t>4</a:t>
-                      </a:r>
-                    </a:p>
-                  </a:txBody>
-                  <a:tcPr anchor="t">
-                    <a:solidFill>
-                      <a:srgbClr val="FFFFFF"/>
-                    </a:solidFill>
-                  </a:tcPr>
-                </a:tc>
-                <a:tc>
-                  <a:txBody>
-                    <a:bodyPr wrap="square"/>
-                    <a:lstStyle/>
-                    <a:p>
-                      <a:pPr>
-                        <a:defRPr b="0" sz="1000">
-                          <a:solidFill>
-                            <a:srgbClr val="333333"/>
-                          </a:solidFill>
-                          <a:latin typeface="Calibri"/>
-                        </a:defRPr>
-                      </a:pPr>
-                      <a:r>
-                        <a:t>7</a:t>
-                      </a:r>
-                    </a:p>
-                  </a:txBody>
-                  <a:tcPr anchor="t">
-                    <a:solidFill>
-                      <a:srgbClr val="FFFFFF"/>
-                    </a:solidFill>
-                  </a:tcPr>
-                </a:tc>
-              </a:tr>
-              <a:tr h="365760">
-                <a:tc>
-                  <a:txBody>
-                    <a:bodyPr wrap="square"/>
-                    <a:lstStyle/>
-                    <a:p>
-                      <a:pPr>
-                        <a:defRPr b="1" sz="1000">
-                          <a:solidFill>
-                            <a:srgbClr val="1A237E"/>
-                          </a:solidFill>
-                          <a:latin typeface="Calibri"/>
-                        </a:defRPr>
-                      </a:pPr>
-                      <a:r>
-                        <a:t>Cast AI</a:t>
-                      </a:r>
-                    </a:p>
-                  </a:txBody>
-                  <a:tcPr anchor="t">
-                    <a:solidFill>
-                      <a:srgbClr val="E3F2FD"/>
-                    </a:solidFill>
-                  </a:tcPr>
-                </a:tc>
-                <a:tc>
-                  <a:txBody>
-                    <a:bodyPr wrap="square"/>
-                    <a:lstStyle/>
-                    <a:p>
-                      <a:pPr>
-                        <a:defRPr b="0" sz="1000">
-                          <a:solidFill>
-                            <a:srgbClr val="333333"/>
-                          </a:solidFill>
-                          <a:latin typeface="Calibri"/>
-                        </a:defRPr>
-                      </a:pPr>
-                      <a:r>
-                        <a:t>1</a:t>
-                      </a:r>
-                    </a:p>
-                  </a:txBody>
-                  <a:tcPr anchor="t">
-                    <a:solidFill>
-                      <a:srgbClr val="E3F2FD"/>
-                    </a:solidFill>
-                  </a:tcPr>
-                </a:tc>
-                <a:tc>
-                  <a:txBody>
-                    <a:bodyPr wrap="square"/>
-                    <a:lstStyle/>
-                    <a:p>
-                      <a:pPr>
-                        <a:defRPr b="0" sz="1000">
-                          <a:solidFill>
-                            <a:srgbClr val="333333"/>
-                          </a:solidFill>
-                          <a:latin typeface="Calibri"/>
-                        </a:defRPr>
-                      </a:pPr>
-                      <a:r>
-                        <a:t>1</a:t>
-                      </a:r>
-                    </a:p>
-                  </a:txBody>
-                  <a:tcPr anchor="t">
-                    <a:solidFill>
-                      <a:srgbClr val="E3F2FD"/>
-                    </a:solidFill>
-                  </a:tcPr>
-                </a:tc>
-                <a:tc>
-                  <a:txBody>
-                    <a:bodyPr wrap="square"/>
-                    <a:lstStyle/>
-                    <a:p>
-                      <a:pPr>
-                        <a:defRPr b="0" sz="1000">
-                          <a:solidFill>
-                            <a:srgbClr val="333333"/>
-                          </a:solidFill>
-                          <a:latin typeface="Calibri"/>
-                        </a:defRPr>
-                      </a:pPr>
-                      <a:r>
-                        <a:t>1</a:t>
-                      </a:r>
-                    </a:p>
-                  </a:txBody>
-                  <a:tcPr anchor="t">
-                    <a:solidFill>
-                      <a:srgbClr val="E3F2FD"/>
-                    </a:solidFill>
-                  </a:tcPr>
-                </a:tc>
-                <a:tc>
-                  <a:txBody>
-                    <a:bodyPr wrap="square"/>
-                    <a:lstStyle/>
-                    <a:p>
-                      <a:pPr>
-                        <a:defRPr b="0" sz="1000">
-                          <a:solidFill>
-                            <a:srgbClr val="333333"/>
-                          </a:solidFill>
-                          <a:latin typeface="Calibri"/>
-                        </a:defRPr>
-                      </a:pPr>
-                      <a:r>
-                        <a:t>3</a:t>
-                      </a:r>
-                    </a:p>
-                  </a:txBody>
-                  <a:tcPr anchor="t">
-                    <a:solidFill>
-                      <a:srgbClr val="E3F2FD"/>
-                    </a:solidFill>
-                  </a:tcPr>
-                </a:tc>
-                <a:tc>
-                  <a:txBody>
-                    <a:bodyPr wrap="square"/>
-                    <a:lstStyle/>
-                    <a:p>
-                      <a:pPr>
-                        <a:defRPr b="0" sz="1000">
-                          <a:solidFill>
-                            <a:srgbClr val="333333"/>
-                          </a:solidFill>
-                          <a:latin typeface="Calibri"/>
-                        </a:defRPr>
-                      </a:pPr>
-                      <a:r>
-                        <a:t>6</a:t>
-                      </a:r>
-                    </a:p>
-                  </a:txBody>
-                  <a:tcPr anchor="t">
-                    <a:solidFill>
-                      <a:srgbClr val="E3F2FD"/>
-                    </a:solidFill>
-                  </a:tcPr>
-                </a:tc>
-              </a:tr>
-              <a:tr h="365760">
-                <a:tc>
-                  <a:txBody>
-                    <a:bodyPr wrap="square"/>
-                    <a:lstStyle/>
-                    <a:p>
-                      <a:pPr>
-                        <a:defRPr b="1" sz="1000">
-                          <a:solidFill>
-                            <a:srgbClr val="1A237E"/>
-                          </a:solidFill>
-                          <a:latin typeface="Calibri"/>
-                        </a:defRPr>
-                      </a:pPr>
-                      <a:r>
-                        <a:t>Azure / AWS Native</a:t>
-                      </a:r>
-                    </a:p>
-                  </a:txBody>
-                  <a:tcPr anchor="t">
-                    <a:solidFill>
-                      <a:srgbClr val="FFFFFF"/>
-                    </a:solidFill>
-                  </a:tcPr>
-                </a:tc>
-                <a:tc>
-                  <a:txBody>
-                    <a:bodyPr wrap="square"/>
-                    <a:lstStyle/>
-                    <a:p>
-                      <a:pPr>
-                        <a:defRPr b="0" sz="1000">
-                          <a:solidFill>
-                            <a:srgbClr val="333333"/>
-                          </a:solidFill>
-                          <a:latin typeface="Calibri"/>
-                        </a:defRPr>
-                      </a:pPr>
-                      <a:r>
-                        <a:t>2</a:t>
-                      </a:r>
-                    </a:p>
-                  </a:txBody>
-                  <a:tcPr anchor="t">
-                    <a:solidFill>
-                      <a:srgbClr val="FFFFFF"/>
-                    </a:solidFill>
-                  </a:tcPr>
-                </a:tc>
-                <a:tc>
-                  <a:txBody>
-                    <a:bodyPr wrap="square"/>
-                    <a:lstStyle/>
-                    <a:p>
-                      <a:pPr>
-                        <a:defRPr b="0" sz="1000">
-                          <a:solidFill>
-                            <a:srgbClr val="333333"/>
-                          </a:solidFill>
-                          <a:latin typeface="Calibri"/>
-                        </a:defRPr>
-                      </a:pPr>
-                      <a:r>
-                        <a:t>3</a:t>
-                      </a:r>
-                    </a:p>
-                  </a:txBody>
-                  <a:tcPr anchor="t">
-                    <a:solidFill>
-                      <a:srgbClr val="FFFFFF"/>
-                    </a:solidFill>
-                  </a:tcPr>
-                </a:tc>
-                <a:tc>
-                  <a:txBody>
-                    <a:bodyPr wrap="square"/>
-                    <a:lstStyle/>
-                    <a:p>
-                      <a:pPr>
-                        <a:defRPr b="0" sz="1000">
-                          <a:solidFill>
-                            <a:srgbClr val="333333"/>
-                          </a:solidFill>
-                          <a:latin typeface="Calibri"/>
-                        </a:defRPr>
-                      </a:pPr>
-                      <a:r>
-                        <a:t>1</a:t>
-                      </a:r>
-                    </a:p>
-                  </a:txBody>
-                  <a:tcPr anchor="t">
-                    <a:solidFill>
-                      <a:srgbClr val="FFFFFF"/>
-                    </a:solidFill>
-                  </a:tcPr>
-                </a:tc>
-                <a:tc>
-                  <a:txBody>
-                    <a:bodyPr wrap="square"/>
-                    <a:lstStyle/>
-                    <a:p>
-                      <a:pPr>
-                        <a:defRPr b="0" sz="1000">
-                          <a:solidFill>
-                            <a:srgbClr val="333333"/>
-                          </a:solidFill>
-                          <a:latin typeface="Calibri"/>
-                        </a:defRPr>
-                      </a:pPr>
-                      <a:r>
-                        <a:t>2</a:t>
-                      </a:r>
-                    </a:p>
-                  </a:txBody>
-                  <a:tcPr anchor="t">
-                    <a:solidFill>
-                      <a:srgbClr val="FFFFFF"/>
-                    </a:solidFill>
-                  </a:tcPr>
-                </a:tc>
-                <a:tc>
-                  <a:txBody>
-                    <a:bodyPr wrap="square"/>
-                    <a:lstStyle/>
-                    <a:p>
-                      <a:pPr>
-                        <a:defRPr b="0" sz="1000">
-                          <a:solidFill>
-                            <a:srgbClr val="333333"/>
-                          </a:solidFill>
-                          <a:latin typeface="Calibri"/>
-                        </a:defRPr>
-                      </a:pPr>
-                      <a:r>
-                        <a:t>8</a:t>
-                      </a:r>
-                    </a:p>
-                  </a:txBody>
-                  <a:tcPr anchor="t">
-                    <a:solidFill>
-                      <a:srgbClr val="FFFFFF"/>
                     </a:solidFill>
                   </a:tcPr>
                 </a:tc>
@@ -6524,8 +7624,8 @@
         </p:nvSpPr>
         <p:spPr>
           <a:xfrm>
-            <a:off x="640080" y="5669280"/>
-            <a:ext cx="10789920" cy="640080"/>
+            <a:off x="640080" y="6309360"/>
+            <a:ext cx="10789920" cy="457200"/>
           </a:xfrm>
           <a:prstGeom prst="rect">
             <a:avLst/>
@@ -6567,8 +7667,8 @@
         </p:nvSpPr>
         <p:spPr>
           <a:xfrm>
-            <a:off x="822960" y="5715000"/>
-            <a:ext cx="10424160" cy="548640"/>
+            <a:off x="822960" y="6327648"/>
+            <a:ext cx="10424160" cy="411480"/>
           </a:xfrm>
           <a:prstGeom prst="rect">
             <a:avLst/>
@@ -6603,7 +7703,7 @@
         </p:nvSpPr>
         <p:spPr>
           <a:xfrm>
-            <a:off x="640080" y="6263640"/>
+            <a:off x="640080" y="6537960"/>
             <a:ext cx="5486400" cy="274320"/>
           </a:xfrm>
           <a:prstGeom prst="rect">
@@ -11366,8 +12466,8 @@
           <p:nvPr/>
         </p:nvGraphicFramePr>
         <p:xfrm>
-          <a:off x="640080" y="1097280"/>
-          <a:ext cx="10789920" cy="3520440"/>
+          <a:off x="640080" y="1051560"/>
+          <a:ext cx="10789920" cy="4608576"/>
         </p:xfrm>
         <a:graphic>
           <a:graphicData uri="http://schemas.openxmlformats.org/drawingml/2006/table">
@@ -11380,7 +12480,7 @@
                 <a:gridCol w="4572000"/>
                 <a:gridCol w="3931920"/>
               </a:tblGrid>
-              <a:tr h="502920">
+              <a:tr h="384048">
                 <a:tc>
                   <a:txBody>
                     <a:bodyPr/>
@@ -11454,7 +12554,7 @@
                   </a:tcPr>
                 </a:tc>
               </a:tr>
-              <a:tr h="502920">
+              <a:tr h="384048">
                 <a:tc>
                   <a:txBody>
                     <a:bodyPr wrap="square"/>
@@ -11528,7 +12628,7 @@
                   </a:tcPr>
                 </a:tc>
               </a:tr>
-              <a:tr h="502920">
+              <a:tr h="384048">
                 <a:tc>
                   <a:txBody>
                     <a:bodyPr wrap="square"/>
@@ -11602,7 +12702,7 @@
                   </a:tcPr>
                 </a:tc>
               </a:tr>
-              <a:tr h="502920">
+              <a:tr h="384048">
                 <a:tc>
                   <a:txBody>
                     <a:bodyPr wrap="square"/>
@@ -11676,7 +12776,7 @@
                   </a:tcPr>
                 </a:tc>
               </a:tr>
-              <a:tr h="502920">
+              <a:tr h="384048">
                 <a:tc>
                   <a:txBody>
                     <a:bodyPr wrap="square"/>
@@ -11750,7 +12850,7 @@
                   </a:tcPr>
                 </a:tc>
               </a:tr>
-              <a:tr h="502920">
+              <a:tr h="384048">
                 <a:tc>
                   <a:txBody>
                     <a:bodyPr wrap="square"/>
@@ -11765,12 +12865,456 @@
                         </a:defRPr>
                       </a:pPr>
                       <a:r>
+                        <a:t>LiteLLM Proxy</a:t>
+                      </a:r>
+                    </a:p>
+                  </a:txBody>
+                  <a:tcPr anchor="t">
+                    <a:solidFill>
+                      <a:srgbClr val="FFFFFF"/>
+                    </a:solidFill>
+                  </a:tcPr>
+                </a:tc>
+                <a:tc>
+                  <a:txBody>
+                    <a:bodyPr wrap="square"/>
+                    <a:lstStyle/>
+                    <a:p>
+                      <a:pPr>
+                        <a:defRPr b="0" sz="1000">
+                          <a:solidFill>
+                            <a:srgbClr val="333333"/>
+                          </a:solidFill>
+                          <a:latin typeface="Calibri"/>
+                        </a:defRPr>
+                      </a:pPr>
+                      <a:r>
+                        <a:t>Unified proxy for 100+ LLMs, request logging, spend tracking</a:t>
+                      </a:r>
+                    </a:p>
+                  </a:txBody>
+                  <a:tcPr anchor="t">
+                    <a:solidFill>
+                      <a:srgbClr val="FFFFFF"/>
+                    </a:solidFill>
+                  </a:tcPr>
+                </a:tc>
+                <a:tc>
+                  <a:txBody>
+                    <a:bodyPr wrap="square"/>
+                    <a:lstStyle/>
+                    <a:p>
+                      <a:pPr>
+                        <a:defRPr b="0" sz="1000">
+                          <a:solidFill>
+                            <a:srgbClr val="333333"/>
+                          </a:solidFill>
+                          <a:latin typeface="Calibri"/>
+                        </a:defRPr>
+                      </a:pPr>
+                      <a:r>
+                        <a:t>Telemetry depth limited to proxy layer; no GPU/training metrics</a:t>
+                      </a:r>
+                    </a:p>
+                  </a:txBody>
+                  <a:tcPr anchor="t">
+                    <a:solidFill>
+                      <a:srgbClr val="FFFFFF"/>
+                    </a:solidFill>
+                  </a:tcPr>
+                </a:tc>
+              </a:tr>
+              <a:tr h="384048">
+                <a:tc>
+                  <a:txBody>
+                    <a:bodyPr wrap="square"/>
+                    <a:lstStyle/>
+                    <a:p>
+                      <a:pPr>
+                        <a:defRPr b="1" sz="1000">
+                          <a:solidFill>
+                            <a:srgbClr val="1A237E"/>
+                          </a:solidFill>
+                          <a:latin typeface="Calibri"/>
+                        </a:defRPr>
+                      </a:pPr>
+                      <a:r>
+                        <a:t>Langfuse</a:t>
+                      </a:r>
+                    </a:p>
+                  </a:txBody>
+                  <a:tcPr anchor="t">
+                    <a:solidFill>
+                      <a:srgbClr val="E3F2FD"/>
+                    </a:solidFill>
+                  </a:tcPr>
+                </a:tc>
+                <a:tc>
+                  <a:txBody>
+                    <a:bodyPr wrap="square"/>
+                    <a:lstStyle/>
+                    <a:p>
+                      <a:pPr>
+                        <a:defRPr b="0" sz="1000">
+                          <a:solidFill>
+                            <a:srgbClr val="333333"/>
+                          </a:solidFill>
+                          <a:latin typeface="Calibri"/>
+                        </a:defRPr>
+                      </a:pPr>
+                      <a:r>
+                        <a:t>Open-source LLM observability, detailed tracing, cost tracking</a:t>
+                      </a:r>
+                    </a:p>
+                  </a:txBody>
+                  <a:tcPr anchor="t">
+                    <a:solidFill>
+                      <a:srgbClr val="E3F2FD"/>
+                    </a:solidFill>
+                  </a:tcPr>
+                </a:tc>
+                <a:tc>
+                  <a:txBody>
+                    <a:bodyPr wrap="square"/>
+                    <a:lstStyle/>
+                    <a:p>
+                      <a:pPr>
+                        <a:defRPr b="0" sz="1000">
+                          <a:solidFill>
+                            <a:srgbClr val="333333"/>
+                          </a:solidFill>
+                          <a:latin typeface="Calibri"/>
+                        </a:defRPr>
+                      </a:pPr>
+                      <a:r>
+                        <a:t>Self-hosted complexity; limited cloud-provider compute telemetry</a:t>
+                      </a:r>
+                    </a:p>
+                  </a:txBody>
+                  <a:tcPr anchor="t">
+                    <a:solidFill>
+                      <a:srgbClr val="E3F2FD"/>
+                    </a:solidFill>
+                  </a:tcPr>
+                </a:tc>
+              </a:tr>
+              <a:tr h="384048">
+                <a:tc>
+                  <a:txBody>
+                    <a:bodyPr wrap="square"/>
+                    <a:lstStyle/>
+                    <a:p>
+                      <a:pPr>
+                        <a:defRPr b="1" sz="1000">
+                          <a:solidFill>
+                            <a:srgbClr val="1A237E"/>
+                          </a:solidFill>
+                          <a:latin typeface="Calibri"/>
+                        </a:defRPr>
+                      </a:pPr>
+                      <a:r>
+                        <a:t>Cloudflare AI Gateway</a:t>
+                      </a:r>
+                    </a:p>
+                  </a:txBody>
+                  <a:tcPr anchor="t">
+                    <a:solidFill>
+                      <a:srgbClr val="FFFFFF"/>
+                    </a:solidFill>
+                  </a:tcPr>
+                </a:tc>
+                <a:tc>
+                  <a:txBody>
+                    <a:bodyPr wrap="square"/>
+                    <a:lstStyle/>
+                    <a:p>
+                      <a:pPr>
+                        <a:defRPr b="0" sz="1000">
+                          <a:solidFill>
+                            <a:srgbClr val="333333"/>
+                          </a:solidFill>
+                          <a:latin typeface="Calibri"/>
+                        </a:defRPr>
+                      </a:pPr>
+                      <a:r>
+                        <a:t>Edge-level logging, caching, provider-agnostic proxy</a:t>
+                      </a:r>
+                    </a:p>
+                  </a:txBody>
+                  <a:tcPr anchor="t">
+                    <a:solidFill>
+                      <a:srgbClr val="FFFFFF"/>
+                    </a:solidFill>
+                  </a:tcPr>
+                </a:tc>
+                <a:tc>
+                  <a:txBody>
+                    <a:bodyPr wrap="square"/>
+                    <a:lstStyle/>
+                    <a:p>
+                      <a:pPr>
+                        <a:defRPr b="0" sz="1000">
+                          <a:solidFill>
+                            <a:srgbClr val="333333"/>
+                          </a:solidFill>
+                          <a:latin typeface="Calibri"/>
+                        </a:defRPr>
+                      </a:pPr>
+                      <a:r>
+                        <a:t>Shallow token metrics; no training/GPU cost capture</a:t>
+                      </a:r>
+                    </a:p>
+                  </a:txBody>
+                  <a:tcPr anchor="t">
+                    <a:solidFill>
+                      <a:srgbClr val="FFFFFF"/>
+                    </a:solidFill>
+                  </a:tcPr>
+                </a:tc>
+              </a:tr>
+              <a:tr h="384048">
+                <a:tc>
+                  <a:txBody>
+                    <a:bodyPr wrap="square"/>
+                    <a:lstStyle/>
+                    <a:p>
+                      <a:pPr>
+                        <a:defRPr b="1" sz="1000">
+                          <a:solidFill>
+                            <a:srgbClr val="1A237E"/>
+                          </a:solidFill>
+                          <a:latin typeface="Calibri"/>
+                        </a:defRPr>
+                      </a:pPr>
+                      <a:r>
+                        <a:t>Datadog LLM Observability</a:t>
+                      </a:r>
+                    </a:p>
+                  </a:txBody>
+                  <a:tcPr anchor="t">
+                    <a:solidFill>
+                      <a:srgbClr val="E3F2FD"/>
+                    </a:solidFill>
+                  </a:tcPr>
+                </a:tc>
+                <a:tc>
+                  <a:txBody>
+                    <a:bodyPr wrap="square"/>
+                    <a:lstStyle/>
+                    <a:p>
+                      <a:pPr>
+                        <a:defRPr b="0" sz="1000">
+                          <a:solidFill>
+                            <a:srgbClr val="333333"/>
+                          </a:solidFill>
+                          <a:latin typeface="Calibri"/>
+                        </a:defRPr>
+                      </a:pPr>
+                      <a:r>
+                        <a:t>Enterprise APM integration, trace-level LLM metrics</a:t>
+                      </a:r>
+                    </a:p>
+                  </a:txBody>
+                  <a:tcPr anchor="t">
+                    <a:solidFill>
+                      <a:srgbClr val="E3F2FD"/>
+                    </a:solidFill>
+                  </a:tcPr>
+                </a:tc>
+                <a:tc>
+                  <a:txBody>
+                    <a:bodyPr wrap="square"/>
+                    <a:lstStyle/>
+                    <a:p>
+                      <a:pPr>
+                        <a:defRPr b="0" sz="1000">
+                          <a:solidFill>
+                            <a:srgbClr val="333333"/>
+                          </a:solidFill>
+                          <a:latin typeface="Calibri"/>
+                        </a:defRPr>
+                      </a:pPr>
+                      <a:r>
+                        <a:t>Requires Datadog stack; limited standalone AI telemetry</a:t>
+                      </a:r>
+                    </a:p>
+                  </a:txBody>
+                  <a:tcPr anchor="t">
+                    <a:solidFill>
+                      <a:srgbClr val="E3F2FD"/>
+                    </a:solidFill>
+                  </a:tcPr>
+                </a:tc>
+              </a:tr>
+              <a:tr h="384048">
+                <a:tc>
+                  <a:txBody>
+                    <a:bodyPr wrap="square"/>
+                    <a:lstStyle/>
+                    <a:p>
+                      <a:pPr>
+                        <a:defRPr b="1" sz="1000">
+                          <a:solidFill>
+                            <a:srgbClr val="1A237E"/>
+                          </a:solidFill>
+                          <a:latin typeface="Calibri"/>
+                        </a:defRPr>
+                      </a:pPr>
+                      <a:r>
+                        <a:t>Braintrust</a:t>
+                      </a:r>
+                    </a:p>
+                  </a:txBody>
+                  <a:tcPr anchor="t">
+                    <a:solidFill>
+                      <a:srgbClr val="FFFFFF"/>
+                    </a:solidFill>
+                  </a:tcPr>
+                </a:tc>
+                <a:tc>
+                  <a:txBody>
+                    <a:bodyPr wrap="square"/>
+                    <a:lstStyle/>
+                    <a:p>
+                      <a:pPr>
+                        <a:defRPr b="0" sz="1000">
+                          <a:solidFill>
+                            <a:srgbClr val="333333"/>
+                          </a:solidFill>
+                          <a:latin typeface="Calibri"/>
+                        </a:defRPr>
+                      </a:pPr>
+                      <a:r>
+                        <a:t>Eval-centric tracing, prompt playground, cost per eval</a:t>
+                      </a:r>
+                    </a:p>
+                  </a:txBody>
+                  <a:tcPr anchor="t">
+                    <a:solidFill>
+                      <a:srgbClr val="FFFFFF"/>
+                    </a:solidFill>
+                  </a:tcPr>
+                </a:tc>
+                <a:tc>
+                  <a:txBody>
+                    <a:bodyPr wrap="square"/>
+                    <a:lstStyle/>
+                    <a:p>
+                      <a:pPr>
+                        <a:defRPr b="0" sz="1000">
+                          <a:solidFill>
+                            <a:srgbClr val="333333"/>
+                          </a:solidFill>
+                          <a:latin typeface="Calibri"/>
+                        </a:defRPr>
+                      </a:pPr>
+                      <a:r>
+                        <a:t>Focused on evals; limited production inference telemetry</a:t>
+                      </a:r>
+                    </a:p>
+                  </a:txBody>
+                  <a:tcPr anchor="t">
+                    <a:solidFill>
+                      <a:srgbClr val="FFFFFF"/>
+                    </a:solidFill>
+                  </a:tcPr>
+                </a:tc>
+              </a:tr>
+              <a:tr h="384048">
+                <a:tc>
+                  <a:txBody>
+                    <a:bodyPr wrap="square"/>
+                    <a:lstStyle/>
+                    <a:p>
+                      <a:pPr>
+                        <a:defRPr b="1" sz="1000">
+                          <a:solidFill>
+                            <a:srgbClr val="1A237E"/>
+                          </a:solidFill>
+                          <a:latin typeface="Calibri"/>
+                        </a:defRPr>
+                      </a:pPr>
+                      <a:r>
                         <a:t>OpenTelemetry + custom</a:t>
                       </a:r>
                     </a:p>
                   </a:txBody>
                   <a:tcPr anchor="t">
                     <a:solidFill>
+                      <a:srgbClr val="E3F2FD"/>
+                    </a:solidFill>
+                  </a:tcPr>
+                </a:tc>
+                <a:tc>
+                  <a:txBody>
+                    <a:bodyPr wrap="square"/>
+                    <a:lstStyle/>
+                    <a:p>
+                      <a:pPr>
+                        <a:defRPr b="0" sz="1000">
+                          <a:solidFill>
+                            <a:srgbClr val="333333"/>
+                          </a:solidFill>
+                          <a:latin typeface="Calibri"/>
+                        </a:defRPr>
+                      </a:pPr>
+                      <a:r>
+                        <a:t>Flexible, open standard</a:t>
+                      </a:r>
+                    </a:p>
+                  </a:txBody>
+                  <a:tcPr anchor="t">
+                    <a:solidFill>
+                      <a:srgbClr val="E3F2FD"/>
+                    </a:solidFill>
+                  </a:tcPr>
+                </a:tc>
+                <a:tc>
+                  <a:txBody>
+                    <a:bodyPr wrap="square"/>
+                    <a:lstStyle/>
+                    <a:p>
+                      <a:pPr>
+                        <a:defRPr b="0" sz="1000">
+                          <a:solidFill>
+                            <a:srgbClr val="333333"/>
+                          </a:solidFill>
+                          <a:latin typeface="Calibri"/>
+                        </a:defRPr>
+                      </a:pPr>
+                      <a:r>
+                        <a:t>Requires heavy custom engineering for AI-specific metrics</a:t>
+                      </a:r>
+                    </a:p>
+                  </a:txBody>
+                  <a:tcPr anchor="t">
+                    <a:solidFill>
+                      <a:srgbClr val="E3F2FD"/>
+                    </a:solidFill>
+                  </a:tcPr>
+                </a:tc>
+              </a:tr>
+              <a:tr h="384048">
+                <a:tc>
+                  <a:txBody>
+                    <a:bodyPr wrap="square"/>
+                    <a:lstStyle/>
+                    <a:p>
+                      <a:pPr>
+                        <a:defRPr b="1" sz="1000">
+                          <a:solidFill>
+                            <a:srgbClr val="1A237E"/>
+                          </a:solidFill>
+                          <a:latin typeface="Calibri"/>
+                        </a:defRPr>
+                      </a:pPr>
+                      <a:r>
+                        <a:t>Cloud-native (AWS/Azure/GCP)</a:t>
+                      </a:r>
+                    </a:p>
+                  </a:txBody>
+                  <a:tcPr anchor="t">
+                    <a:solidFill>
                       <a:srgbClr val="FFFFFF"/>
                     </a:solidFill>
                   </a:tcPr>
@@ -11789,7 +13333,7 @@
                         </a:defRPr>
                       </a:pPr>
                       <a:r>
-                        <a:t>Flexible, open standard</a:t>
+                        <a:t>Good compute-level telemetry</a:t>
                       </a:r>
                     </a:p>
                   </a:txBody>
@@ -11813,87 +13357,13 @@
                         </a:defRPr>
                       </a:pPr>
                       <a:r>
-                        <a:t>Requires heavy custom engineering for AI-specific metrics</a:t>
+                        <a:t>No token-level or model-level granularity</a:t>
                       </a:r>
                     </a:p>
                   </a:txBody>
                   <a:tcPr anchor="t">
                     <a:solidFill>
                       <a:srgbClr val="FFFFFF"/>
-                    </a:solidFill>
-                  </a:tcPr>
-                </a:tc>
-              </a:tr>
-              <a:tr h="502920">
-                <a:tc>
-                  <a:txBody>
-                    <a:bodyPr wrap="square"/>
-                    <a:lstStyle/>
-                    <a:p>
-                      <a:pPr>
-                        <a:defRPr b="1" sz="1000">
-                          <a:solidFill>
-                            <a:srgbClr val="1A237E"/>
-                          </a:solidFill>
-                          <a:latin typeface="Calibri"/>
-                        </a:defRPr>
-                      </a:pPr>
-                      <a:r>
-                        <a:t>Cloud-native (AWS/Azure/GCP)</a:t>
-                      </a:r>
-                    </a:p>
-                  </a:txBody>
-                  <a:tcPr anchor="t">
-                    <a:solidFill>
-                      <a:srgbClr val="E3F2FD"/>
-                    </a:solidFill>
-                  </a:tcPr>
-                </a:tc>
-                <a:tc>
-                  <a:txBody>
-                    <a:bodyPr wrap="square"/>
-                    <a:lstStyle/>
-                    <a:p>
-                      <a:pPr>
-                        <a:defRPr b="0" sz="1000">
-                          <a:solidFill>
-                            <a:srgbClr val="333333"/>
-                          </a:solidFill>
-                          <a:latin typeface="Calibri"/>
-                        </a:defRPr>
-                      </a:pPr>
-                      <a:r>
-                        <a:t>Good compute-level telemetry</a:t>
-                      </a:r>
-                    </a:p>
-                  </a:txBody>
-                  <a:tcPr anchor="t">
-                    <a:solidFill>
-                      <a:srgbClr val="E3F2FD"/>
-                    </a:solidFill>
-                  </a:tcPr>
-                </a:tc>
-                <a:tc>
-                  <a:txBody>
-                    <a:bodyPr wrap="square"/>
-                    <a:lstStyle/>
-                    <a:p>
-                      <a:pPr>
-                        <a:defRPr b="0" sz="1000">
-                          <a:solidFill>
-                            <a:srgbClr val="333333"/>
-                          </a:solidFill>
-                          <a:latin typeface="Calibri"/>
-                        </a:defRPr>
-                      </a:pPr>
-                      <a:r>
-                        <a:t>No token-level or model-level granularity</a:t>
-                      </a:r>
-                    </a:p>
-                  </a:txBody>
-                  <a:tcPr anchor="t">
-                    <a:solidFill>
-                      <a:srgbClr val="E3F2FD"/>
                     </a:solidFill>
                   </a:tcPr>
                 </a:tc>
@@ -11910,7 +13380,7 @@
         </p:nvSpPr>
         <p:spPr>
           <a:xfrm>
-            <a:off x="640080" y="5303520"/>
+            <a:off x="640080" y="5806440"/>
             <a:ext cx="10789920" cy="640080"/>
           </a:xfrm>
           <a:prstGeom prst="rect">
@@ -11953,7 +13423,7 @@
         </p:nvSpPr>
         <p:spPr>
           <a:xfrm>
-            <a:off x="822960" y="5349240"/>
+            <a:off x="822960" y="5852160"/>
             <a:ext cx="10424160" cy="548640"/>
           </a:xfrm>
           <a:prstGeom prst="rect">
@@ -12476,8 +13946,8 @@
           <p:nvPr/>
         </p:nvGraphicFramePr>
         <p:xfrm>
-          <a:off x="640080" y="1097280"/>
-          <a:ext cx="10789920" cy="3520440"/>
+          <a:off x="640080" y="1051560"/>
+          <a:ext cx="10789920" cy="4608576"/>
         </p:xfrm>
         <a:graphic>
           <a:graphicData uri="http://schemas.openxmlformats.org/drawingml/2006/table">
@@ -12490,7 +13960,7 @@
                 <a:gridCol w="4572000"/>
                 <a:gridCol w="3931920"/>
               </a:tblGrid>
-              <a:tr h="502920">
+              <a:tr h="384048">
                 <a:tc>
                   <a:txBody>
                     <a:bodyPr/>
@@ -12564,7 +14034,7 @@
                   </a:tcPr>
                 </a:tc>
               </a:tr>
-              <a:tr h="502920">
+              <a:tr h="384048">
                 <a:tc>
                   <a:txBody>
                     <a:bodyPr wrap="square"/>
@@ -12638,7 +14108,7 @@
                   </a:tcPr>
                 </a:tc>
               </a:tr>
-              <a:tr h="502920">
+              <a:tr h="384048">
                 <a:tc>
                   <a:txBody>
                     <a:bodyPr wrap="square"/>
@@ -12712,7 +14182,7 @@
                   </a:tcPr>
                 </a:tc>
               </a:tr>
-              <a:tr h="502920">
+              <a:tr h="384048">
                 <a:tc>
                   <a:txBody>
                     <a:bodyPr wrap="square"/>
@@ -12727,12 +14197,456 @@
                         </a:defRPr>
                       </a:pPr>
                       <a:r>
+                        <a:t>LiteLLM Proxy</a:t>
+                      </a:r>
+                    </a:p>
+                  </a:txBody>
+                  <a:tcPr anchor="t">
+                    <a:solidFill>
+                      <a:srgbClr val="FFFFFF"/>
+                    </a:solidFill>
+                  </a:tcPr>
+                </a:tc>
+                <a:tc>
+                  <a:txBody>
+                    <a:bodyPr wrap="square"/>
+                    <a:lstStyle/>
+                    <a:p>
+                      <a:pPr>
+                        <a:defRPr b="0" sz="1000">
+                          <a:solidFill>
+                            <a:srgbClr val="333333"/>
+                          </a:solidFill>
+                          <a:latin typeface="Calibri"/>
+                        </a:defRPr>
+                      </a:pPr>
+                      <a:r>
+                        <a:t>Budget limits per key/user, model access controls, spend alerts</a:t>
+                      </a:r>
+                    </a:p>
+                  </a:txBody>
+                  <a:tcPr anchor="t">
+                    <a:solidFill>
+                      <a:srgbClr val="FFFFFF"/>
+                    </a:solidFill>
+                  </a:tcPr>
+                </a:tc>
+                <a:tc>
+                  <a:txBody>
+                    <a:bodyPr wrap="square"/>
+                    <a:lstStyle/>
+                    <a:p>
+                      <a:pPr>
+                        <a:defRPr b="0" sz="1000">
+                          <a:solidFill>
+                            <a:srgbClr val="333333"/>
+                          </a:solidFill>
+                          <a:latin typeface="Calibri"/>
+                        </a:defRPr>
+                      </a:pPr>
+                      <a:r>
+                        <a:t>No approval workflows; RBAC is key-based, not enterprise IAM</a:t>
+                      </a:r>
+                    </a:p>
+                  </a:txBody>
+                  <a:tcPr anchor="t">
+                    <a:solidFill>
+                      <a:srgbClr val="FFFFFF"/>
+                    </a:solidFill>
+                  </a:tcPr>
+                </a:tc>
+              </a:tr>
+              <a:tr h="384048">
+                <a:tc>
+                  <a:txBody>
+                    <a:bodyPr wrap="square"/>
+                    <a:lstStyle/>
+                    <a:p>
+                      <a:pPr>
+                        <a:defRPr b="1" sz="1000">
+                          <a:solidFill>
+                            <a:srgbClr val="1A237E"/>
+                          </a:solidFill>
+                          <a:latin typeface="Calibri"/>
+                        </a:defRPr>
+                      </a:pPr>
+                      <a:r>
+                        <a:t>Langfuse</a:t>
+                      </a:r>
+                    </a:p>
+                  </a:txBody>
+                  <a:tcPr anchor="t">
+                    <a:solidFill>
+                      <a:srgbClr val="E3F2FD"/>
+                    </a:solidFill>
+                  </a:tcPr>
+                </a:tc>
+                <a:tc>
+                  <a:txBody>
+                    <a:bodyPr wrap="square"/>
+                    <a:lstStyle/>
+                    <a:p>
+                      <a:pPr>
+                        <a:defRPr b="0" sz="1000">
+                          <a:solidFill>
+                            <a:srgbClr val="333333"/>
+                          </a:solidFill>
+                          <a:latin typeface="Calibri"/>
+                        </a:defRPr>
+                      </a:pPr>
+                      <a:r>
+                        <a:t>No native enforcement</a:t>
+                      </a:r>
+                    </a:p>
+                  </a:txBody>
+                  <a:tcPr anchor="t">
+                    <a:solidFill>
+                      <a:srgbClr val="E3F2FD"/>
+                    </a:solidFill>
+                  </a:tcPr>
+                </a:tc>
+                <a:tc>
+                  <a:txBody>
+                    <a:bodyPr wrap="square"/>
+                    <a:lstStyle/>
+                    <a:p>
+                      <a:pPr>
+                        <a:defRPr b="0" sz="1000">
+                          <a:solidFill>
+                            <a:srgbClr val="333333"/>
+                          </a:solidFill>
+                          <a:latin typeface="Calibri"/>
+                        </a:defRPr>
+                      </a:pPr>
+                      <a:r>
+                        <a:t>Observability-only; no quota, rate-limit, or governance features</a:t>
+                      </a:r>
+                    </a:p>
+                  </a:txBody>
+                  <a:tcPr anchor="t">
+                    <a:solidFill>
+                      <a:srgbClr val="E3F2FD"/>
+                    </a:solidFill>
+                  </a:tcPr>
+                </a:tc>
+              </a:tr>
+              <a:tr h="384048">
+                <a:tc>
+                  <a:txBody>
+                    <a:bodyPr wrap="square"/>
+                    <a:lstStyle/>
+                    <a:p>
+                      <a:pPr>
+                        <a:defRPr b="1" sz="1000">
+                          <a:solidFill>
+                            <a:srgbClr val="1A237E"/>
+                          </a:solidFill>
+                          <a:latin typeface="Calibri"/>
+                        </a:defRPr>
+                      </a:pPr>
+                      <a:r>
+                        <a:t>Cloudflare AI Gateway</a:t>
+                      </a:r>
+                    </a:p>
+                  </a:txBody>
+                  <a:tcPr anchor="t">
+                    <a:solidFill>
+                      <a:srgbClr val="FFFFFF"/>
+                    </a:solidFill>
+                  </a:tcPr>
+                </a:tc>
+                <a:tc>
+                  <a:txBody>
+                    <a:bodyPr wrap="square"/>
+                    <a:lstStyle/>
+                    <a:p>
+                      <a:pPr>
+                        <a:defRPr b="0" sz="1000">
+                          <a:solidFill>
+                            <a:srgbClr val="333333"/>
+                          </a:solidFill>
+                          <a:latin typeface="Calibri"/>
+                        </a:defRPr>
+                      </a:pPr>
+                      <a:r>
+                        <a:t>Rate limiting at edge, caching policies</a:t>
+                      </a:r>
+                    </a:p>
+                  </a:txBody>
+                  <a:tcPr anchor="t">
+                    <a:solidFill>
+                      <a:srgbClr val="FFFFFF"/>
+                    </a:solidFill>
+                  </a:tcPr>
+                </a:tc>
+                <a:tc>
+                  <a:txBody>
+                    <a:bodyPr wrap="square"/>
+                    <a:lstStyle/>
+                    <a:p>
+                      <a:pPr>
+                        <a:defRPr b="0" sz="1000">
+                          <a:solidFill>
+                            <a:srgbClr val="333333"/>
+                          </a:solidFill>
+                          <a:latin typeface="Calibri"/>
+                        </a:defRPr>
+                      </a:pPr>
+                      <a:r>
+                        <a:t>No budget caps, no model-level RBAC or approval workflows</a:t>
+                      </a:r>
+                    </a:p>
+                  </a:txBody>
+                  <a:tcPr anchor="t">
+                    <a:solidFill>
+                      <a:srgbClr val="FFFFFF"/>
+                    </a:solidFill>
+                  </a:tcPr>
+                </a:tc>
+              </a:tr>
+              <a:tr h="384048">
+                <a:tc>
+                  <a:txBody>
+                    <a:bodyPr wrap="square"/>
+                    <a:lstStyle/>
+                    <a:p>
+                      <a:pPr>
+                        <a:defRPr b="1" sz="1000">
+                          <a:solidFill>
+                            <a:srgbClr val="1A237E"/>
+                          </a:solidFill>
+                          <a:latin typeface="Calibri"/>
+                        </a:defRPr>
+                      </a:pPr>
+                      <a:r>
+                        <a:t>Datadog LLM Observability</a:t>
+                      </a:r>
+                    </a:p>
+                  </a:txBody>
+                  <a:tcPr anchor="t">
+                    <a:solidFill>
+                      <a:srgbClr val="E3F2FD"/>
+                    </a:solidFill>
+                  </a:tcPr>
+                </a:tc>
+                <a:tc>
+                  <a:txBody>
+                    <a:bodyPr wrap="square"/>
+                    <a:lstStyle/>
+                    <a:p>
+                      <a:pPr>
+                        <a:defRPr b="0" sz="1000">
+                          <a:solidFill>
+                            <a:srgbClr val="333333"/>
+                          </a:solidFill>
+                          <a:latin typeface="Calibri"/>
+                        </a:defRPr>
+                      </a:pPr>
+                      <a:r>
+                        <a:t>Alerting on anomalous usage patterns</a:t>
+                      </a:r>
+                    </a:p>
+                  </a:txBody>
+                  <a:tcPr anchor="t">
+                    <a:solidFill>
+                      <a:srgbClr val="E3F2FD"/>
+                    </a:solidFill>
+                  </a:tcPr>
+                </a:tc>
+                <a:tc>
+                  <a:txBody>
+                    <a:bodyPr wrap="square"/>
+                    <a:lstStyle/>
+                    <a:p>
+                      <a:pPr>
+                        <a:defRPr b="0" sz="1000">
+                          <a:solidFill>
+                            <a:srgbClr val="333333"/>
+                          </a:solidFill>
+                          <a:latin typeface="Calibri"/>
+                        </a:defRPr>
+                      </a:pPr>
+                      <a:r>
+                        <a:t>Monitoring-only; no enforcement, no quota or access policies</a:t>
+                      </a:r>
+                    </a:p>
+                  </a:txBody>
+                  <a:tcPr anchor="t">
+                    <a:solidFill>
+                      <a:srgbClr val="E3F2FD"/>
+                    </a:solidFill>
+                  </a:tcPr>
+                </a:tc>
+              </a:tr>
+              <a:tr h="384048">
+                <a:tc>
+                  <a:txBody>
+                    <a:bodyPr wrap="square"/>
+                    <a:lstStyle/>
+                    <a:p>
+                      <a:pPr>
+                        <a:defRPr b="1" sz="1000">
+                          <a:solidFill>
+                            <a:srgbClr val="1A237E"/>
+                          </a:solidFill>
+                          <a:latin typeface="Calibri"/>
+                        </a:defRPr>
+                      </a:pPr>
+                      <a:r>
+                        <a:t>Braintrust</a:t>
+                      </a:r>
+                    </a:p>
+                  </a:txBody>
+                  <a:tcPr anchor="t">
+                    <a:solidFill>
+                      <a:srgbClr val="FFFFFF"/>
+                    </a:solidFill>
+                  </a:tcPr>
+                </a:tc>
+                <a:tc>
+                  <a:txBody>
+                    <a:bodyPr wrap="square"/>
+                    <a:lstStyle/>
+                    <a:p>
+                      <a:pPr>
+                        <a:defRPr b="0" sz="1000">
+                          <a:solidFill>
+                            <a:srgbClr val="333333"/>
+                          </a:solidFill>
+                          <a:latin typeface="Calibri"/>
+                        </a:defRPr>
+                      </a:pPr>
+                      <a:r>
+                        <a:t>Org-level access controls</a:t>
+                      </a:r>
+                    </a:p>
+                  </a:txBody>
+                  <a:tcPr anchor="t">
+                    <a:solidFill>
+                      <a:srgbClr val="FFFFFF"/>
+                    </a:solidFill>
+                  </a:tcPr>
+                </a:tc>
+                <a:tc>
+                  <a:txBody>
+                    <a:bodyPr wrap="square"/>
+                    <a:lstStyle/>
+                    <a:p>
+                      <a:pPr>
+                        <a:defRPr b="0" sz="1000">
+                          <a:solidFill>
+                            <a:srgbClr val="333333"/>
+                          </a:solidFill>
+                          <a:latin typeface="Calibri"/>
+                        </a:defRPr>
+                      </a:pPr>
+                      <a:r>
+                        <a:t>No rate limiting, no budget enforcement, no policy engine</a:t>
+                      </a:r>
+                    </a:p>
+                  </a:txBody>
+                  <a:tcPr anchor="t">
+                    <a:solidFill>
+                      <a:srgbClr val="FFFFFF"/>
+                    </a:solidFill>
+                  </a:tcPr>
+                </a:tc>
+              </a:tr>
+              <a:tr h="384048">
+                <a:tc>
+                  <a:txBody>
+                    <a:bodyPr wrap="square"/>
+                    <a:lstStyle/>
+                    <a:p>
+                      <a:pPr>
+                        <a:defRPr b="1" sz="1000">
+                          <a:solidFill>
+                            <a:srgbClr val="1A237E"/>
+                          </a:solidFill>
+                          <a:latin typeface="Calibri"/>
+                        </a:defRPr>
+                      </a:pPr>
+                      <a:r>
                         <a:t>Azure OpenAI</a:t>
                       </a:r>
                     </a:p>
                   </a:txBody>
                   <a:tcPr anchor="t">
                     <a:solidFill>
+                      <a:srgbClr val="E3F2FD"/>
+                    </a:solidFill>
+                  </a:tcPr>
+                </a:tc>
+                <a:tc>
+                  <a:txBody>
+                    <a:bodyPr wrap="square"/>
+                    <a:lstStyle/>
+                    <a:p>
+                      <a:pPr>
+                        <a:defRPr b="0" sz="1000">
+                          <a:solidFill>
+                            <a:srgbClr val="333333"/>
+                          </a:solidFill>
+                          <a:latin typeface="Calibri"/>
+                        </a:defRPr>
+                      </a:pPr>
+                      <a:r>
+                        <a:t>Token-per-minute quotas, RBAC via Azure AD</a:t>
+                      </a:r>
+                    </a:p>
+                  </a:txBody>
+                  <a:tcPr anchor="t">
+                    <a:solidFill>
+                      <a:srgbClr val="E3F2FD"/>
+                    </a:solidFill>
+                  </a:tcPr>
+                </a:tc>
+                <a:tc>
+                  <a:txBody>
+                    <a:bodyPr wrap="square"/>
+                    <a:lstStyle/>
+                    <a:p>
+                      <a:pPr>
+                        <a:defRPr b="0" sz="1000">
+                          <a:solidFill>
+                            <a:srgbClr val="333333"/>
+                          </a:solidFill>
+                          <a:latin typeface="Calibri"/>
+                        </a:defRPr>
+                      </a:pPr>
+                      <a:r>
+                        <a:t>Azure-only, no multi-provider support</a:t>
+                      </a:r>
+                    </a:p>
+                  </a:txBody>
+                  <a:tcPr anchor="t">
+                    <a:solidFill>
+                      <a:srgbClr val="E3F2FD"/>
+                    </a:solidFill>
+                  </a:tcPr>
+                </a:tc>
+              </a:tr>
+              <a:tr h="384048">
+                <a:tc>
+                  <a:txBody>
+                    <a:bodyPr wrap="square"/>
+                    <a:lstStyle/>
+                    <a:p>
+                      <a:pPr>
+                        <a:defRPr b="1" sz="1000">
+                          <a:solidFill>
+                            <a:srgbClr val="1A237E"/>
+                          </a:solidFill>
+                          <a:latin typeface="Calibri"/>
+                        </a:defRPr>
+                      </a:pPr>
+                      <a:r>
+                        <a:t>AWS Bedrock</a:t>
+                      </a:r>
+                    </a:p>
+                  </a:txBody>
+                  <a:tcPr anchor="t">
+                    <a:solidFill>
                       <a:srgbClr val="FFFFFF"/>
                     </a:solidFill>
                   </a:tcPr>
@@ -12751,7 +14665,7 @@
                         </a:defRPr>
                       </a:pPr>
                       <a:r>
-                        <a:t>Token-per-minute quotas, RBAC via Azure AD</a:t>
+                        <a:t>IAM-based access, model-level permissions</a:t>
                       </a:r>
                     </a:p>
                   </a:txBody>
@@ -12775,7 +14689,7 @@
                         </a:defRPr>
                       </a:pPr>
                       <a:r>
-                        <a:t>Azure-only, no multi-provider support</a:t>
+                        <a:t>AWS-only, no budget-based enforcement</a:t>
                       </a:r>
                     </a:p>
                   </a:txBody>
@@ -12786,7 +14700,7 @@
                   </a:tcPr>
                 </a:tc>
               </a:tr>
-              <a:tr h="502920">
+              <a:tr h="384048">
                 <a:tc>
                   <a:txBody>
                     <a:bodyPr wrap="square"/>
@@ -12801,7 +14715,7 @@
                         </a:defRPr>
                       </a:pPr>
                       <a:r>
-                        <a:t>AWS Bedrock</a:t>
+                        <a:t>Kong / Apigee</a:t>
                       </a:r>
                     </a:p>
                   </a:txBody>
@@ -12825,7 +14739,7 @@
                         </a:defRPr>
                       </a:pPr>
                       <a:r>
-                        <a:t>IAM-based access, model-level permissions</a:t>
+                        <a:t>Strong rate limiting, authentication</a:t>
                       </a:r>
                     </a:p>
                   </a:txBody>
@@ -12849,7 +14763,7 @@
                         </a:defRPr>
                       </a:pPr>
                       <a:r>
-                        <a:t>AWS-only, no budget-based enforcement</a:t>
+                        <a:t>Not AI-aware, no token-based quotas</a:t>
                       </a:r>
                     </a:p>
                   </a:txBody>
@@ -12860,7 +14774,7 @@
                   </a:tcPr>
                 </a:tc>
               </a:tr>
-              <a:tr h="502920">
+              <a:tr h="384048">
                 <a:tc>
                   <a:txBody>
                     <a:bodyPr wrap="square"/>
@@ -12875,7 +14789,7 @@
                         </a:defRPr>
                       </a:pPr>
                       <a:r>
-                        <a:t>Kong / Apigee</a:t>
+                        <a:t>Custom solutions</a:t>
                       </a:r>
                     </a:p>
                   </a:txBody>
@@ -12899,7 +14813,7 @@
                         </a:defRPr>
                       </a:pPr>
                       <a:r>
-                        <a:t>Strong rate limiting, authentication</a:t>
+                        <a:t>Many enterprises building in-house</a:t>
                       </a:r>
                     </a:p>
                   </a:txBody>
@@ -12923,87 +14837,13 @@
                         </a:defRPr>
                       </a:pPr>
                       <a:r>
-                        <a:t>Not AI-aware, no token-based quotas</a:t>
+                        <a:t>High maintenance, inconsistent implementation</a:t>
                       </a:r>
                     </a:p>
                   </a:txBody>
                   <a:tcPr anchor="t">
                     <a:solidFill>
                       <a:srgbClr val="FFFFFF"/>
-                    </a:solidFill>
-                  </a:tcPr>
-                </a:tc>
-              </a:tr>
-              <a:tr h="502920">
-                <a:tc>
-                  <a:txBody>
-                    <a:bodyPr wrap="square"/>
-                    <a:lstStyle/>
-                    <a:p>
-                      <a:pPr>
-                        <a:defRPr b="1" sz="1000">
-                          <a:solidFill>
-                            <a:srgbClr val="1A237E"/>
-                          </a:solidFill>
-                          <a:latin typeface="Calibri"/>
-                        </a:defRPr>
-                      </a:pPr>
-                      <a:r>
-                        <a:t>Custom solutions</a:t>
-                      </a:r>
-                    </a:p>
-                  </a:txBody>
-                  <a:tcPr anchor="t">
-                    <a:solidFill>
-                      <a:srgbClr val="E3F2FD"/>
-                    </a:solidFill>
-                  </a:tcPr>
-                </a:tc>
-                <a:tc>
-                  <a:txBody>
-                    <a:bodyPr wrap="square"/>
-                    <a:lstStyle/>
-                    <a:p>
-                      <a:pPr>
-                        <a:defRPr b="0" sz="1000">
-                          <a:solidFill>
-                            <a:srgbClr val="333333"/>
-                          </a:solidFill>
-                          <a:latin typeface="Calibri"/>
-                        </a:defRPr>
-                      </a:pPr>
-                      <a:r>
-                        <a:t>Many enterprises building in-house</a:t>
-                      </a:r>
-                    </a:p>
-                  </a:txBody>
-                  <a:tcPr anchor="t">
-                    <a:solidFill>
-                      <a:srgbClr val="E3F2FD"/>
-                    </a:solidFill>
-                  </a:tcPr>
-                </a:tc>
-                <a:tc>
-                  <a:txBody>
-                    <a:bodyPr wrap="square"/>
-                    <a:lstStyle/>
-                    <a:p>
-                      <a:pPr>
-                        <a:defRPr b="0" sz="1000">
-                          <a:solidFill>
-                            <a:srgbClr val="333333"/>
-                          </a:solidFill>
-                          <a:latin typeface="Calibri"/>
-                        </a:defRPr>
-                      </a:pPr>
-                      <a:r>
-                        <a:t>High maintenance, inconsistent implementation</a:t>
-                      </a:r>
-                    </a:p>
-                  </a:txBody>
-                  <a:tcPr anchor="t">
-                    <a:solidFill>
-                      <a:srgbClr val="E3F2FD"/>
                     </a:solidFill>
                   </a:tcPr>
                 </a:tc>
@@ -13020,7 +14860,7 @@
         </p:nvSpPr>
         <p:spPr>
           <a:xfrm>
-            <a:off x="640080" y="5303520"/>
+            <a:off x="640080" y="5806440"/>
             <a:ext cx="10789920" cy="777240"/>
           </a:xfrm>
           <a:prstGeom prst="rect">
@@ -13063,7 +14903,7 @@
         </p:nvSpPr>
         <p:spPr>
           <a:xfrm>
-            <a:off x="822960" y="5349240"/>
+            <a:off x="822960" y="5852160"/>
             <a:ext cx="10424160" cy="685800"/>
           </a:xfrm>
           <a:prstGeom prst="rect">
@@ -13586,8 +15426,8 @@
           <p:nvPr/>
         </p:nvGraphicFramePr>
         <p:xfrm>
-          <a:off x="640080" y="1097280"/>
-          <a:ext cx="10789920" cy="3520440"/>
+          <a:off x="640080" y="1051560"/>
+          <a:ext cx="10789920" cy="4608576"/>
         </p:xfrm>
         <a:graphic>
           <a:graphicData uri="http://schemas.openxmlformats.org/drawingml/2006/table">
@@ -13600,7 +15440,7 @@
                 <a:gridCol w="4572000"/>
                 <a:gridCol w="3931920"/>
               </a:tblGrid>
-              <a:tr h="502920">
+              <a:tr h="384048">
                 <a:tc>
                   <a:txBody>
                     <a:bodyPr/>
@@ -13674,7 +15514,7 @@
                   </a:tcPr>
                 </a:tc>
               </a:tr>
-              <a:tr h="502920">
+              <a:tr h="384048">
                 <a:tc>
                   <a:txBody>
                     <a:bodyPr wrap="square"/>
@@ -13748,7 +15588,7 @@
                   </a:tcPr>
                 </a:tc>
               </a:tr>
-              <a:tr h="502920">
+              <a:tr h="384048">
                 <a:tc>
                   <a:txBody>
                     <a:bodyPr wrap="square"/>
@@ -13822,7 +15662,7 @@
                   </a:tcPr>
                 </a:tc>
               </a:tr>
-              <a:tr h="502920">
+              <a:tr h="384048">
                 <a:tc>
                   <a:txBody>
                     <a:bodyPr wrap="square"/>
@@ -13896,7 +15736,7 @@
                   </a:tcPr>
                 </a:tc>
               </a:tr>
-              <a:tr h="502920">
+              <a:tr h="384048">
                 <a:tc>
                   <a:txBody>
                     <a:bodyPr wrap="square"/>
@@ -13970,7 +15810,7 @@
                   </a:tcPr>
                 </a:tc>
               </a:tr>
-              <a:tr h="502920">
+              <a:tr h="384048">
                 <a:tc>
                   <a:txBody>
                     <a:bodyPr wrap="square"/>
@@ -13985,12 +15825,456 @@
                         </a:defRPr>
                       </a:pPr>
                       <a:r>
+                        <a:t>LiteLLM Proxy</a:t>
+                      </a:r>
+                    </a:p>
+                  </a:txBody>
+                  <a:tcPr anchor="t">
+                    <a:solidFill>
+                      <a:srgbClr val="FFFFFF"/>
+                    </a:solidFill>
+                  </a:tcPr>
+                </a:tc>
+                <a:tc>
+                  <a:txBody>
+                    <a:bodyPr wrap="square"/>
+                    <a:lstStyle/>
+                    <a:p>
+                      <a:pPr>
+                        <a:defRPr b="0" sz="1000">
+                          <a:solidFill>
+                            <a:srgbClr val="333333"/>
+                          </a:solidFill>
+                          <a:latin typeface="Calibri"/>
+                        </a:defRPr>
+                      </a:pPr>
+                      <a:r>
+                        <a:t>Per-key spend tracking, model cost comparison</a:t>
+                      </a:r>
+                    </a:p>
+                  </a:txBody>
+                  <a:tcPr anchor="t">
+                    <a:solidFill>
+                      <a:srgbClr val="FFFFFF"/>
+                    </a:solidFill>
+                  </a:tcPr>
+                </a:tc>
+                <a:tc>
+                  <a:txBody>
+                    <a:bodyPr wrap="square"/>
+                    <a:lstStyle/>
+                    <a:p>
+                      <a:pPr>
+                        <a:defRPr b="0" sz="1000">
+                          <a:solidFill>
+                            <a:srgbClr val="333333"/>
+                          </a:solidFill>
+                          <a:latin typeface="Calibri"/>
+                        </a:defRPr>
+                      </a:pPr>
+                      <a:r>
+                        <a:t>No ROI attribution, no business outcome mapping</a:t>
+                      </a:r>
+                    </a:p>
+                  </a:txBody>
+                  <a:tcPr anchor="t">
+                    <a:solidFill>
+                      <a:srgbClr val="FFFFFF"/>
+                    </a:solidFill>
+                  </a:tcPr>
+                </a:tc>
+              </a:tr>
+              <a:tr h="384048">
+                <a:tc>
+                  <a:txBody>
+                    <a:bodyPr wrap="square"/>
+                    <a:lstStyle/>
+                    <a:p>
+                      <a:pPr>
+                        <a:defRPr b="1" sz="1000">
+                          <a:solidFill>
+                            <a:srgbClr val="1A237E"/>
+                          </a:solidFill>
+                          <a:latin typeface="Calibri"/>
+                        </a:defRPr>
+                      </a:pPr>
+                      <a:r>
+                        <a:t>Langfuse</a:t>
+                      </a:r>
+                    </a:p>
+                  </a:txBody>
+                  <a:tcPr anchor="t">
+                    <a:solidFill>
+                      <a:srgbClr val="E3F2FD"/>
+                    </a:solidFill>
+                  </a:tcPr>
+                </a:tc>
+                <a:tc>
+                  <a:txBody>
+                    <a:bodyPr wrap="square"/>
+                    <a:lstStyle/>
+                    <a:p>
+                      <a:pPr>
+                        <a:defRPr b="0" sz="1000">
+                          <a:solidFill>
+                            <a:srgbClr val="333333"/>
+                          </a:solidFill>
+                          <a:latin typeface="Calibri"/>
+                        </a:defRPr>
+                      </a:pPr>
+                      <a:r>
+                        <a:t>Cost per trace/generation, model cost breakdown</a:t>
+                      </a:r>
+                    </a:p>
+                  </a:txBody>
+                  <a:tcPr anchor="t">
+                    <a:solidFill>
+                      <a:srgbClr val="E3F2FD"/>
+                    </a:solidFill>
+                  </a:tcPr>
+                </a:tc>
+                <a:tc>
+                  <a:txBody>
+                    <a:bodyPr wrap="square"/>
+                    <a:lstStyle/>
+                    <a:p>
+                      <a:pPr>
+                        <a:defRPr b="0" sz="1000">
+                          <a:solidFill>
+                            <a:srgbClr val="333333"/>
+                          </a:solidFill>
+                          <a:latin typeface="Calibri"/>
+                        </a:defRPr>
+                      </a:pPr>
+                      <a:r>
+                        <a:t>No ROI attribution, no unit economics trending</a:t>
+                      </a:r>
+                    </a:p>
+                  </a:txBody>
+                  <a:tcPr anchor="t">
+                    <a:solidFill>
+                      <a:srgbClr val="E3F2FD"/>
+                    </a:solidFill>
+                  </a:tcPr>
+                </a:tc>
+              </a:tr>
+              <a:tr h="384048">
+                <a:tc>
+                  <a:txBody>
+                    <a:bodyPr wrap="square"/>
+                    <a:lstStyle/>
+                    <a:p>
+                      <a:pPr>
+                        <a:defRPr b="1" sz="1000">
+                          <a:solidFill>
+                            <a:srgbClr val="1A237E"/>
+                          </a:solidFill>
+                          <a:latin typeface="Calibri"/>
+                        </a:defRPr>
+                      </a:pPr>
+                      <a:r>
+                        <a:t>Cloudflare AI Gateway</a:t>
+                      </a:r>
+                    </a:p>
+                  </a:txBody>
+                  <a:tcPr anchor="t">
+                    <a:solidFill>
+                      <a:srgbClr val="FFFFFF"/>
+                    </a:solidFill>
+                  </a:tcPr>
+                </a:tc>
+                <a:tc>
+                  <a:txBody>
+                    <a:bodyPr wrap="square"/>
+                    <a:lstStyle/>
+                    <a:p>
+                      <a:pPr>
+                        <a:defRPr b="0" sz="1000">
+                          <a:solidFill>
+                            <a:srgbClr val="333333"/>
+                          </a:solidFill>
+                          <a:latin typeface="Calibri"/>
+                        </a:defRPr>
+                      </a:pPr>
+                      <a:r>
+                        <a:t>Request-level cost logging</a:t>
+                      </a:r>
+                    </a:p>
+                  </a:txBody>
+                  <a:tcPr anchor="t">
+                    <a:solidFill>
+                      <a:srgbClr val="FFFFFF"/>
+                    </a:solidFill>
+                  </a:tcPr>
+                </a:tc>
+                <a:tc>
+                  <a:txBody>
+                    <a:bodyPr wrap="square"/>
+                    <a:lstStyle/>
+                    <a:p>
+                      <a:pPr>
+                        <a:defRPr b="0" sz="1000">
+                          <a:solidFill>
+                            <a:srgbClr val="333333"/>
+                          </a:solidFill>
+                          <a:latin typeface="Calibri"/>
+                        </a:defRPr>
+                      </a:pPr>
+                      <a:r>
+                        <a:t>No cost aggregation, no ROI or unit economics</a:t>
+                      </a:r>
+                    </a:p>
+                  </a:txBody>
+                  <a:tcPr anchor="t">
+                    <a:solidFill>
+                      <a:srgbClr val="FFFFFF"/>
+                    </a:solidFill>
+                  </a:tcPr>
+                </a:tc>
+              </a:tr>
+              <a:tr h="384048">
+                <a:tc>
+                  <a:txBody>
+                    <a:bodyPr wrap="square"/>
+                    <a:lstStyle/>
+                    <a:p>
+                      <a:pPr>
+                        <a:defRPr b="1" sz="1000">
+                          <a:solidFill>
+                            <a:srgbClr val="1A237E"/>
+                          </a:solidFill>
+                          <a:latin typeface="Calibri"/>
+                        </a:defRPr>
+                      </a:pPr>
+                      <a:r>
+                        <a:t>Datadog LLM Observability</a:t>
+                      </a:r>
+                    </a:p>
+                  </a:txBody>
+                  <a:tcPr anchor="t">
+                    <a:solidFill>
+                      <a:srgbClr val="E3F2FD"/>
+                    </a:solidFill>
+                  </a:tcPr>
+                </a:tc>
+                <a:tc>
+                  <a:txBody>
+                    <a:bodyPr wrap="square"/>
+                    <a:lstStyle/>
+                    <a:p>
+                      <a:pPr>
+                        <a:defRPr b="0" sz="1000">
+                          <a:solidFill>
+                            <a:srgbClr val="333333"/>
+                          </a:solidFill>
+                          <a:latin typeface="Calibri"/>
+                        </a:defRPr>
+                      </a:pPr>
+                      <a:r>
+                        <a:t>Cost metrics within APM dashboards</a:t>
+                      </a:r>
+                    </a:p>
+                  </a:txBody>
+                  <a:tcPr anchor="t">
+                    <a:solidFill>
+                      <a:srgbClr val="E3F2FD"/>
+                    </a:solidFill>
+                  </a:tcPr>
+                </a:tc>
+                <a:tc>
+                  <a:txBody>
+                    <a:bodyPr wrap="square"/>
+                    <a:lstStyle/>
+                    <a:p>
+                      <a:pPr>
+                        <a:defRPr b="0" sz="1000">
+                          <a:solidFill>
+                            <a:srgbClr val="333333"/>
+                          </a:solidFill>
+                          <a:latin typeface="Calibri"/>
+                        </a:defRPr>
+                      </a:pPr>
+                      <a:r>
+                        <a:t>No AI-specific ROI; requires Datadog ecosystem</a:t>
+                      </a:r>
+                    </a:p>
+                  </a:txBody>
+                  <a:tcPr anchor="t">
+                    <a:solidFill>
+                      <a:srgbClr val="E3F2FD"/>
+                    </a:solidFill>
+                  </a:tcPr>
+                </a:tc>
+              </a:tr>
+              <a:tr h="384048">
+                <a:tc>
+                  <a:txBody>
+                    <a:bodyPr wrap="square"/>
+                    <a:lstStyle/>
+                    <a:p>
+                      <a:pPr>
+                        <a:defRPr b="1" sz="1000">
+                          <a:solidFill>
+                            <a:srgbClr val="1A237E"/>
+                          </a:solidFill>
+                          <a:latin typeface="Calibri"/>
+                        </a:defRPr>
+                      </a:pPr>
+                      <a:r>
+                        <a:t>Braintrust</a:t>
+                      </a:r>
+                    </a:p>
+                  </a:txBody>
+                  <a:tcPr anchor="t">
+                    <a:solidFill>
+                      <a:srgbClr val="FFFFFF"/>
+                    </a:solidFill>
+                  </a:tcPr>
+                </a:tc>
+                <a:tc>
+                  <a:txBody>
+                    <a:bodyPr wrap="square"/>
+                    <a:lstStyle/>
+                    <a:p>
+                      <a:pPr>
+                        <a:defRPr b="0" sz="1000">
+                          <a:solidFill>
+                            <a:srgbClr val="333333"/>
+                          </a:solidFill>
+                          <a:latin typeface="Calibri"/>
+                        </a:defRPr>
+                      </a:pPr>
+                      <a:r>
+                        <a:t>Cost per eval, model comparison scoring</a:t>
+                      </a:r>
+                    </a:p>
+                  </a:txBody>
+                  <a:tcPr anchor="t">
+                    <a:solidFill>
+                      <a:srgbClr val="FFFFFF"/>
+                    </a:solidFill>
+                  </a:tcPr>
+                </a:tc>
+                <a:tc>
+                  <a:txBody>
+                    <a:bodyPr wrap="square"/>
+                    <a:lstStyle/>
+                    <a:p>
+                      <a:pPr>
+                        <a:defRPr b="0" sz="1000">
+                          <a:solidFill>
+                            <a:srgbClr val="333333"/>
+                          </a:solidFill>
+                          <a:latin typeface="Calibri"/>
+                        </a:defRPr>
+                      </a:pPr>
+                      <a:r>
+                        <a:t>Eval-focused; no production ROI or business outcome metrics</a:t>
+                      </a:r>
+                    </a:p>
+                  </a:txBody>
+                  <a:tcPr anchor="t">
+                    <a:solidFill>
+                      <a:srgbClr val="FFFFFF"/>
+                    </a:solidFill>
+                  </a:tcPr>
+                </a:tc>
+              </a:tr>
+              <a:tr h="384048">
+                <a:tc>
+                  <a:txBody>
+                    <a:bodyPr wrap="square"/>
+                    <a:lstStyle/>
+                    <a:p>
+                      <a:pPr>
+                        <a:defRPr b="1" sz="1000">
+                          <a:solidFill>
+                            <a:srgbClr val="1A237E"/>
+                          </a:solidFill>
+                          <a:latin typeface="Calibri"/>
+                        </a:defRPr>
+                      </a:pPr>
+                      <a:r>
                         <a:t>Helicone / Portkey</a:t>
                       </a:r>
                     </a:p>
                   </a:txBody>
                   <a:tcPr anchor="t">
                     <a:solidFill>
+                      <a:srgbClr val="E3F2FD"/>
+                    </a:solidFill>
+                  </a:tcPr>
+                </a:tc>
+                <a:tc>
+                  <a:txBody>
+                    <a:bodyPr wrap="square"/>
+                    <a:lstStyle/>
+                    <a:p>
+                      <a:pPr>
+                        <a:defRPr b="0" sz="1000">
+                          <a:solidFill>
+                            <a:srgbClr val="333333"/>
+                          </a:solidFill>
+                          <a:latin typeface="Calibri"/>
+                        </a:defRPr>
+                      </a:pPr>
+                      <a:r>
+                        <a:t>Basic cost tracking per request</a:t>
+                      </a:r>
+                    </a:p>
+                  </a:txBody>
+                  <a:tcPr anchor="t">
+                    <a:solidFill>
+                      <a:srgbClr val="E3F2FD"/>
+                    </a:solidFill>
+                  </a:tcPr>
+                </a:tc>
+                <a:tc>
+                  <a:txBody>
+                    <a:bodyPr wrap="square"/>
+                    <a:lstStyle/>
+                    <a:p>
+                      <a:pPr>
+                        <a:defRPr b="0" sz="1000">
+                          <a:solidFill>
+                            <a:srgbClr val="333333"/>
+                          </a:solidFill>
+                          <a:latin typeface="Calibri"/>
+                        </a:defRPr>
+                      </a:pPr>
+                      <a:r>
+                        <a:t>No ROI attribution, no business outcome correlation</a:t>
+                      </a:r>
+                    </a:p>
+                  </a:txBody>
+                  <a:tcPr anchor="t">
+                    <a:solidFill>
+                      <a:srgbClr val="E3F2FD"/>
+                    </a:solidFill>
+                  </a:tcPr>
+                </a:tc>
+              </a:tr>
+              <a:tr h="384048">
+                <a:tc>
+                  <a:txBody>
+                    <a:bodyPr wrap="square"/>
+                    <a:lstStyle/>
+                    <a:p>
+                      <a:pPr>
+                        <a:defRPr b="1" sz="1000">
+                          <a:solidFill>
+                            <a:srgbClr val="1A237E"/>
+                          </a:solidFill>
+                          <a:latin typeface="Calibri"/>
+                        </a:defRPr>
+                      </a:pPr>
+                      <a:r>
+                        <a:t>Weights &amp; Biases</a:t>
+                      </a:r>
+                    </a:p>
+                  </a:txBody>
+                  <a:tcPr anchor="t">
+                    <a:solidFill>
                       <a:srgbClr val="FFFFFF"/>
                     </a:solidFill>
                   </a:tcPr>
@@ -14009,7 +16293,7 @@
                         </a:defRPr>
                       </a:pPr>
                       <a:r>
-                        <a:t>Basic cost tracking per request</a:t>
+                        <a:t>Experiment cost tracking</a:t>
                       </a:r>
                     </a:p>
                   </a:txBody>
@@ -14033,87 +16317,13 @@
                         </a:defRPr>
                       </a:pPr>
                       <a:r>
-                        <a:t>No ROI attribution, no business outcome correlation</a:t>
+                        <a:t>No business ROI, training-focused only</a:t>
                       </a:r>
                     </a:p>
                   </a:txBody>
                   <a:tcPr anchor="t">
                     <a:solidFill>
                       <a:srgbClr val="FFFFFF"/>
-                    </a:solidFill>
-                  </a:tcPr>
-                </a:tc>
-              </a:tr>
-              <a:tr h="502920">
-                <a:tc>
-                  <a:txBody>
-                    <a:bodyPr wrap="square"/>
-                    <a:lstStyle/>
-                    <a:p>
-                      <a:pPr>
-                        <a:defRPr b="1" sz="1000">
-                          <a:solidFill>
-                            <a:srgbClr val="1A237E"/>
-                          </a:solidFill>
-                          <a:latin typeface="Calibri"/>
-                        </a:defRPr>
-                      </a:pPr>
-                      <a:r>
-                        <a:t>Weights &amp; Biases</a:t>
-                      </a:r>
-                    </a:p>
-                  </a:txBody>
-                  <a:tcPr anchor="t">
-                    <a:solidFill>
-                      <a:srgbClr val="E3F2FD"/>
-                    </a:solidFill>
-                  </a:tcPr>
-                </a:tc>
-                <a:tc>
-                  <a:txBody>
-                    <a:bodyPr wrap="square"/>
-                    <a:lstStyle/>
-                    <a:p>
-                      <a:pPr>
-                        <a:defRPr b="0" sz="1000">
-                          <a:solidFill>
-                            <a:srgbClr val="333333"/>
-                          </a:solidFill>
-                          <a:latin typeface="Calibri"/>
-                        </a:defRPr>
-                      </a:pPr>
-                      <a:r>
-                        <a:t>Experiment cost tracking</a:t>
-                      </a:r>
-                    </a:p>
-                  </a:txBody>
-                  <a:tcPr anchor="t">
-                    <a:solidFill>
-                      <a:srgbClr val="E3F2FD"/>
-                    </a:solidFill>
-                  </a:tcPr>
-                </a:tc>
-                <a:tc>
-                  <a:txBody>
-                    <a:bodyPr wrap="square"/>
-                    <a:lstStyle/>
-                    <a:p>
-                      <a:pPr>
-                        <a:defRPr b="0" sz="1000">
-                          <a:solidFill>
-                            <a:srgbClr val="333333"/>
-                          </a:solidFill>
-                          <a:latin typeface="Calibri"/>
-                        </a:defRPr>
-                      </a:pPr>
-                      <a:r>
-                        <a:t>No business ROI, training-focused only</a:t>
-                      </a:r>
-                    </a:p>
-                  </a:txBody>
-                  <a:tcPr anchor="t">
-                    <a:solidFill>
-                      <a:srgbClr val="E3F2FD"/>
                     </a:solidFill>
                   </a:tcPr>
                 </a:tc>
@@ -14130,7 +16340,7 @@
         </p:nvSpPr>
         <p:spPr>
           <a:xfrm>
-            <a:off x="640080" y="5303520"/>
+            <a:off x="640080" y="5806440"/>
             <a:ext cx="10789920" cy="640080"/>
           </a:xfrm>
           <a:prstGeom prst="rect">
@@ -14173,7 +16383,7 @@
         </p:nvSpPr>
         <p:spPr>
           <a:xfrm>
-            <a:off x="822960" y="5349240"/>
+            <a:off x="822960" y="5852160"/>
             <a:ext cx="10424160" cy="548640"/>
           </a:xfrm>
           <a:prstGeom prst="rect">
